--- a/Coding Embedded Workstream - Common Idea Poster V2.pptx
+++ b/Coding Embedded Workstream - Common Idea Poster V2.pptx
@@ -3090,7 +3090,7 @@
       <p:grpSpPr/>
       <p:pic>
         <p:nvPicPr>
-          <p:cNvPr id="2" name="Picture 1" descr="aeplo_honeywell_jtag_background.png"/>
+          <p:cNvPr id="2" name="Picture 1" descr="pcb_background_explicit.png"/>
           <p:cNvPicPr>
             <a:picLocks noChangeAspect="1"/>
           </p:cNvPicPr>
@@ -3112,9 +3112,1945 @@
           </a:prstGeom>
         </p:spPr>
       </p:pic>
+      <p:sp>
+        <p:nvSpPr>
+          <p:cNvPr id="3" name="Rectangle 2"/>
+          <p:cNvSpPr/>
+          <p:nvPr/>
+        </p:nvSpPr>
+        <p:spPr>
+          <a:xfrm>
+            <a:off x="0" y="0"/>
+            <a:ext cx="12191999" cy="73152"/>
+          </a:xfrm>
+          <a:prstGeom prst="rect">
+            <a:avLst/>
+          </a:prstGeom>
+          <a:solidFill>
+            <a:srgbClr val="D71920"/>
+          </a:solidFill>
+          <a:ln>
+            <a:noFill/>
+          </a:ln>
+        </p:spPr>
+        <p:style>
+          <a:lnRef idx="1">
+            <a:schemeClr val="accent1"/>
+          </a:lnRef>
+          <a:fillRef idx="3">
+            <a:schemeClr val="accent1"/>
+          </a:fillRef>
+          <a:effectRef idx="2">
+            <a:schemeClr val="accent1"/>
+          </a:effectRef>
+          <a:fontRef idx="minor">
+            <a:schemeClr val="lt1"/>
+          </a:fontRef>
+        </p:style>
+        <p:txBody>
+          <a:bodyPr rtlCol="0" anchor="ctr"/>
+          <a:lstStyle/>
+          <a:p>
+            <a:pPr algn="ctr"/>
+          </a:p>
+        </p:txBody>
+      </p:sp>
+      <p:sp>
+        <p:nvSpPr>
+          <p:cNvPr id="4" name="Rectangle 3"/>
+          <p:cNvSpPr/>
+          <p:nvPr/>
+        </p:nvSpPr>
+        <p:spPr>
+          <a:xfrm>
+            <a:off x="0" y="6473952"/>
+            <a:ext cx="12191999" cy="384048"/>
+          </a:xfrm>
+          <a:prstGeom prst="rect">
+            <a:avLst/>
+          </a:prstGeom>
+          <a:solidFill>
+            <a:srgbClr val="F2F2F2"/>
+          </a:solidFill>
+          <a:ln>
+            <a:noFill/>
+          </a:ln>
+        </p:spPr>
+        <p:style>
+          <a:lnRef idx="1">
+            <a:schemeClr val="accent1"/>
+          </a:lnRef>
+          <a:fillRef idx="3">
+            <a:schemeClr val="accent1"/>
+          </a:fillRef>
+          <a:effectRef idx="2">
+            <a:schemeClr val="accent1"/>
+          </a:effectRef>
+          <a:fontRef idx="minor">
+            <a:schemeClr val="lt1"/>
+          </a:fontRef>
+        </p:style>
+        <p:txBody>
+          <a:bodyPr rtlCol="0" anchor="ctr"/>
+          <a:lstStyle/>
+          <a:p>
+            <a:pPr algn="ctr"/>
+          </a:p>
+        </p:txBody>
+      </p:sp>
+      <p:sp>
+        <p:nvSpPr>
+          <p:cNvPr id="5" name="Rounded Rectangle 4"/>
+          <p:cNvSpPr/>
+          <p:nvPr/>
+        </p:nvSpPr>
+        <p:spPr>
+          <a:xfrm>
+            <a:off x="237744" y="146304"/>
+            <a:ext cx="5074920" cy="6181344"/>
+          </a:xfrm>
+          <a:prstGeom prst="roundRect">
+            <a:avLst/>
+          </a:prstGeom>
+          <a:solidFill>
+            <a:srgbClr val="111111"/>
+          </a:solidFill>
+          <a:ln w="13970">
+            <a:solidFill>
+              <a:srgbClr val="D71920"/>
+            </a:solidFill>
+          </a:ln>
+        </p:spPr>
+        <p:style>
+          <a:lnRef idx="1">
+            <a:schemeClr val="accent1"/>
+          </a:lnRef>
+          <a:fillRef idx="3">
+            <a:schemeClr val="accent1"/>
+          </a:fillRef>
+          <a:effectRef idx="2">
+            <a:schemeClr val="accent1"/>
+          </a:effectRef>
+          <a:fontRef idx="minor">
+            <a:schemeClr val="lt1"/>
+          </a:fontRef>
+        </p:style>
+        <p:txBody>
+          <a:bodyPr rtlCol="0" anchor="ctr"/>
+          <a:lstStyle/>
+          <a:p>
+            <a:pPr algn="ctr"/>
+          </a:p>
+        </p:txBody>
+      </p:sp>
+      <p:sp>
+        <p:nvSpPr>
+          <p:cNvPr id="6" name="TextBox 5"/>
+          <p:cNvSpPr txBox="1"/>
+          <p:nvPr/>
+        </p:nvSpPr>
+        <p:spPr>
+          <a:xfrm>
+            <a:off x="438912" y="329184"/>
+            <a:ext cx="4572000" cy="310896"/>
+          </a:xfrm>
+          <a:prstGeom prst="rect">
+            <a:avLst/>
+          </a:prstGeom>
+          <a:noFill/>
+        </p:spPr>
+        <p:txBody>
+          <a:bodyPr wrap="square" lIns="18288" rIns="18288">
+            <a:spAutoFit/>
+          </a:bodyPr>
+          <a:lstStyle/>
+          <a:p>
+            <a:pPr algn="l"/>
+            <a:r>
+              <a:rPr sz="2100" b="1" i="0">
+                <a:solidFill>
+                  <a:srgbClr val="FFFFFF"/>
+                </a:solidFill>
+                <a:latin typeface="Arial"/>
+              </a:rPr>
+              <a:t>CONNECTED EMBEDDED DATA.</a:t>
+            </a:r>
+          </a:p>
+        </p:txBody>
+      </p:sp>
+      <p:sp>
+        <p:nvSpPr>
+          <p:cNvPr id="7" name="TextBox 6"/>
+          <p:cNvSpPr txBox="1"/>
+          <p:nvPr/>
+        </p:nvSpPr>
+        <p:spPr>
+          <a:xfrm>
+            <a:off x="438912" y="658368"/>
+            <a:ext cx="4572000" cy="292608"/>
+          </a:xfrm>
+          <a:prstGeom prst="rect">
+            <a:avLst/>
+          </a:prstGeom>
+          <a:noFill/>
+        </p:spPr>
+        <p:txBody>
+          <a:bodyPr wrap="square" lIns="18288" rIns="18288">
+            <a:spAutoFit/>
+          </a:bodyPr>
+          <a:lstStyle/>
+          <a:p>
+            <a:pPr algn="l"/>
+            <a:r>
+              <a:rPr sz="1900" b="1" i="0">
+                <a:solidFill>
+                  <a:srgbClr val="D71920"/>
+                </a:solidFill>
+                <a:latin typeface="Arial"/>
+              </a:rPr>
+              <a:t>REAL JTAG + MCU EVIDENCE.</a:t>
+            </a:r>
+          </a:p>
+        </p:txBody>
+      </p:sp>
+      <p:sp>
+        <p:nvSpPr>
+          <p:cNvPr id="8" name="TextBox 7"/>
+          <p:cNvSpPr txBox="1"/>
+          <p:nvPr/>
+        </p:nvSpPr>
+        <p:spPr>
+          <a:xfrm>
+            <a:off x="457200" y="1005840"/>
+            <a:ext cx="4480560" cy="292608"/>
+          </a:xfrm>
+          <a:prstGeom prst="rect">
+            <a:avLst/>
+          </a:prstGeom>
+          <a:noFill/>
+        </p:spPr>
+        <p:txBody>
+          <a:bodyPr wrap="square" lIns="18288" rIns="18288">
+            <a:spAutoFit/>
+          </a:bodyPr>
+          <a:lstStyle/>
+          <a:p>
+            <a:pPr algn="l"/>
+            <a:r>
+              <a:rPr sz="919" b="0" i="0">
+                <a:solidFill>
+                  <a:srgbClr val="E8E8E8"/>
+                </a:solidFill>
+                <a:latin typeface="Arial"/>
+              </a:rPr>
+              <a:t>AEPLO turns SoC / MCU debug signals into traceable PDLC decisions across PG1, PG3 and PG5.</a:t>
+            </a:r>
+          </a:p>
+        </p:txBody>
+      </p:sp>
+      <p:sp>
+        <p:nvSpPr>
+          <p:cNvPr id="9" name="TextBox 8"/>
+          <p:cNvSpPr txBox="1"/>
+          <p:nvPr/>
+        </p:nvSpPr>
+        <p:spPr>
+          <a:xfrm>
+            <a:off x="457200" y="1536192"/>
+            <a:ext cx="1920240" cy="146304"/>
+          </a:xfrm>
+          <a:prstGeom prst="rect">
+            <a:avLst/>
+          </a:prstGeom>
+          <a:noFill/>
+        </p:spPr>
+        <p:txBody>
+          <a:bodyPr wrap="square" lIns="18288" rIns="18288">
+            <a:spAutoFit/>
+          </a:bodyPr>
+          <a:lstStyle/>
+          <a:p>
+            <a:pPr algn="l"/>
+            <a:r>
+              <a:rPr sz="930" b="1" i="0">
+                <a:solidFill>
+                  <a:srgbClr val="D71920"/>
+                </a:solidFill>
+                <a:latin typeface="Arial"/>
+              </a:rPr>
+              <a:t>WHAT STANDS OUT</a:t>
+            </a:r>
+          </a:p>
+        </p:txBody>
+      </p:sp>
+      <p:sp>
+        <p:nvSpPr>
+          <p:cNvPr id="10" name="Rounded Rectangle 9"/>
+          <p:cNvSpPr/>
+          <p:nvPr/>
+        </p:nvSpPr>
+        <p:spPr>
+          <a:xfrm>
+            <a:off x="457200" y="1810512"/>
+            <a:ext cx="4407408" cy="475488"/>
+          </a:xfrm>
+          <a:prstGeom prst="roundRect">
+            <a:avLst/>
+          </a:prstGeom>
+          <a:solidFill>
+            <a:srgbClr val="333333"/>
+          </a:solidFill>
+          <a:ln w="13970">
+            <a:solidFill>
+              <a:srgbClr val="D71920"/>
+            </a:solidFill>
+          </a:ln>
+        </p:spPr>
+        <p:style>
+          <a:lnRef idx="1">
+            <a:schemeClr val="accent1"/>
+          </a:lnRef>
+          <a:fillRef idx="3">
+            <a:schemeClr val="accent1"/>
+          </a:fillRef>
+          <a:effectRef idx="2">
+            <a:schemeClr val="accent1"/>
+          </a:effectRef>
+          <a:fontRef idx="minor">
+            <a:schemeClr val="lt1"/>
+          </a:fontRef>
+        </p:style>
+        <p:txBody>
+          <a:bodyPr rtlCol="0" anchor="ctr"/>
+          <a:lstStyle/>
+          <a:p>
+            <a:pPr algn="ctr"/>
+          </a:p>
+        </p:txBody>
+      </p:sp>
+      <p:sp>
+        <p:nvSpPr>
+          <p:cNvPr id="11" name="TextBox 10"/>
+          <p:cNvSpPr txBox="1"/>
+          <p:nvPr/>
+        </p:nvSpPr>
+        <p:spPr>
+          <a:xfrm>
+            <a:off x="621792" y="1874520"/>
+            <a:ext cx="1600200" cy="109728"/>
+          </a:xfrm>
+          <a:prstGeom prst="rect">
+            <a:avLst/>
+          </a:prstGeom>
+          <a:noFill/>
+        </p:spPr>
+        <p:txBody>
+          <a:bodyPr wrap="square" lIns="18288" rIns="18288">
+            <a:spAutoFit/>
+          </a:bodyPr>
+          <a:lstStyle/>
+          <a:p>
+            <a:pPr algn="l"/>
+            <a:r>
+              <a:rPr sz="770" b="1" i="0">
+                <a:solidFill>
+                  <a:srgbClr val="FFFFFF"/>
+                </a:solidFill>
+                <a:latin typeface="Arial"/>
+              </a:rPr>
+              <a:t>SoC / MCU close-up</a:t>
+            </a:r>
+          </a:p>
+        </p:txBody>
+      </p:sp>
+      <p:sp>
+        <p:nvSpPr>
+          <p:cNvPr id="12" name="TextBox 11"/>
+          <p:cNvSpPr txBox="1"/>
+          <p:nvPr/>
+        </p:nvSpPr>
+        <p:spPr>
+          <a:xfrm>
+            <a:off x="2240280" y="1874520"/>
+            <a:ext cx="2423160" cy="146304"/>
+          </a:xfrm>
+          <a:prstGeom prst="rect">
+            <a:avLst/>
+          </a:prstGeom>
+          <a:noFill/>
+        </p:spPr>
+        <p:txBody>
+          <a:bodyPr wrap="square" lIns="18288" rIns="18288">
+            <a:spAutoFit/>
+          </a:bodyPr>
+          <a:lstStyle/>
+          <a:p>
+            <a:pPr algn="l"/>
+            <a:r>
+              <a:rPr sz="645" b="0" i="0">
+                <a:solidFill>
+                  <a:srgbClr val="E8E8E8"/>
+                </a:solidFill>
+                <a:latin typeface="Arial"/>
+              </a:rPr>
+              <a:t>Cortex-M target context, vector table, ADC, SysTick, flash map</a:t>
+            </a:r>
+          </a:p>
+        </p:txBody>
+      </p:sp>
+      <p:sp>
+        <p:nvSpPr>
+          <p:cNvPr id="13" name="Rounded Rectangle 12"/>
+          <p:cNvSpPr/>
+          <p:nvPr/>
+        </p:nvSpPr>
+        <p:spPr>
+          <a:xfrm>
+            <a:off x="457200" y="2468880"/>
+            <a:ext cx="4407408" cy="475488"/>
+          </a:xfrm>
+          <a:prstGeom prst="roundRect">
+            <a:avLst/>
+          </a:prstGeom>
+          <a:solidFill>
+            <a:srgbClr val="333333"/>
+          </a:solidFill>
+          <a:ln w="13970">
+            <a:solidFill>
+              <a:srgbClr val="2E7D32"/>
+            </a:solidFill>
+          </a:ln>
+        </p:spPr>
+        <p:style>
+          <a:lnRef idx="1">
+            <a:schemeClr val="accent1"/>
+          </a:lnRef>
+          <a:fillRef idx="3">
+            <a:schemeClr val="accent1"/>
+          </a:fillRef>
+          <a:effectRef idx="2">
+            <a:schemeClr val="accent1"/>
+          </a:effectRef>
+          <a:fontRef idx="minor">
+            <a:schemeClr val="lt1"/>
+          </a:fontRef>
+        </p:style>
+        <p:txBody>
+          <a:bodyPr rtlCol="0" anchor="ctr"/>
+          <a:lstStyle/>
+          <a:p>
+            <a:pPr algn="ctr"/>
+          </a:p>
+        </p:txBody>
+      </p:sp>
+      <p:sp>
+        <p:nvSpPr>
+          <p:cNvPr id="14" name="TextBox 13"/>
+          <p:cNvSpPr txBox="1"/>
+          <p:nvPr/>
+        </p:nvSpPr>
+        <p:spPr>
+          <a:xfrm>
+            <a:off x="621792" y="2532888"/>
+            <a:ext cx="1600200" cy="109728"/>
+          </a:xfrm>
+          <a:prstGeom prst="rect">
+            <a:avLst/>
+          </a:prstGeom>
+          <a:noFill/>
+        </p:spPr>
+        <p:txBody>
+          <a:bodyPr wrap="square" lIns="18288" rIns="18288">
+            <a:spAutoFit/>
+          </a:bodyPr>
+          <a:lstStyle/>
+          <a:p>
+            <a:pPr algn="l"/>
+            <a:r>
+              <a:rPr sz="770" b="1" i="0">
+                <a:solidFill>
+                  <a:srgbClr val="FFFFFF"/>
+                </a:solidFill>
+                <a:latin typeface="Arial"/>
+              </a:rPr>
+              <a:t>JTAG/SWD header + probe</a:t>
+            </a:r>
+          </a:p>
+        </p:txBody>
+      </p:sp>
+      <p:sp>
+        <p:nvSpPr>
+          <p:cNvPr id="15" name="TextBox 14"/>
+          <p:cNvSpPr txBox="1"/>
+          <p:nvPr/>
+        </p:nvSpPr>
+        <p:spPr>
+          <a:xfrm>
+            <a:off x="2240280" y="2532888"/>
+            <a:ext cx="2423160" cy="146304"/>
+          </a:xfrm>
+          <a:prstGeom prst="rect">
+            <a:avLst/>
+          </a:prstGeom>
+          <a:noFill/>
+        </p:spPr>
+        <p:txBody>
+          <a:bodyPr wrap="square" lIns="18288" rIns="18288">
+            <a:spAutoFit/>
+          </a:bodyPr>
+          <a:lstStyle/>
+          <a:p>
+            <a:pPr algn="l"/>
+            <a:r>
+              <a:rPr sz="645" b="0" i="0">
+                <a:solidFill>
+                  <a:srgbClr val="E8E8E8"/>
+                </a:solidFill>
+                <a:latin typeface="Arial"/>
+              </a:rPr>
+              <a:t>10-pin header, SWDIO, SWCLK, reset and live target session</a:t>
+            </a:r>
+          </a:p>
+        </p:txBody>
+      </p:sp>
+      <p:sp>
+        <p:nvSpPr>
+          <p:cNvPr id="16" name="Rounded Rectangle 15"/>
+          <p:cNvSpPr/>
+          <p:nvPr/>
+        </p:nvSpPr>
+        <p:spPr>
+          <a:xfrm>
+            <a:off x="457200" y="3127248"/>
+            <a:ext cx="4407408" cy="475488"/>
+          </a:xfrm>
+          <a:prstGeom prst="roundRect">
+            <a:avLst/>
+          </a:prstGeom>
+          <a:solidFill>
+            <a:srgbClr val="333333"/>
+          </a:solidFill>
+          <a:ln w="13970">
+            <a:solidFill>
+              <a:srgbClr val="D71920"/>
+            </a:solidFill>
+          </a:ln>
+        </p:spPr>
+        <p:style>
+          <a:lnRef idx="1">
+            <a:schemeClr val="accent1"/>
+          </a:lnRef>
+          <a:fillRef idx="3">
+            <a:schemeClr val="accent1"/>
+          </a:fillRef>
+          <a:effectRef idx="2">
+            <a:schemeClr val="accent1"/>
+          </a:effectRef>
+          <a:fontRef idx="minor">
+            <a:schemeClr val="lt1"/>
+          </a:fontRef>
+        </p:style>
+        <p:txBody>
+          <a:bodyPr rtlCol="0" anchor="ctr"/>
+          <a:lstStyle/>
+          <a:p>
+            <a:pPr algn="ctr"/>
+          </a:p>
+        </p:txBody>
+      </p:sp>
+      <p:sp>
+        <p:nvSpPr>
+          <p:cNvPr id="17" name="TextBox 16"/>
+          <p:cNvSpPr txBox="1"/>
+          <p:nvPr/>
+        </p:nvSpPr>
+        <p:spPr>
+          <a:xfrm>
+            <a:off x="621792" y="3191256"/>
+            <a:ext cx="1600200" cy="109728"/>
+          </a:xfrm>
+          <a:prstGeom prst="rect">
+            <a:avLst/>
+          </a:prstGeom>
+          <a:noFill/>
+        </p:spPr>
+        <p:txBody>
+          <a:bodyPr wrap="square" lIns="18288" rIns="18288">
+            <a:spAutoFit/>
+          </a:bodyPr>
+          <a:lstStyle/>
+          <a:p>
+            <a:pPr algn="l"/>
+            <a:r>
+              <a:rPr sz="770" b="1" i="0">
+                <a:solidFill>
+                  <a:srgbClr val="FFFFFF"/>
+                </a:solidFill>
+                <a:latin typeface="Arial"/>
+              </a:rPr>
+              <a:t>Debug evidence overlay</a:t>
+            </a:r>
+          </a:p>
+        </p:txBody>
+      </p:sp>
+      <p:sp>
+        <p:nvSpPr>
+          <p:cNvPr id="18" name="TextBox 17"/>
+          <p:cNvSpPr txBox="1"/>
+          <p:nvPr/>
+        </p:nvSpPr>
+        <p:spPr>
+          <a:xfrm>
+            <a:off x="2240280" y="3191256"/>
+            <a:ext cx="2423160" cy="146304"/>
+          </a:xfrm>
+          <a:prstGeom prst="rect">
+            <a:avLst/>
+          </a:prstGeom>
+          <a:noFill/>
+        </p:spPr>
+        <p:txBody>
+          <a:bodyPr wrap="square" lIns="18288" rIns="18288">
+            <a:spAutoFit/>
+          </a:bodyPr>
+          <a:lstStyle/>
+          <a:p>
+            <a:pPr algn="l"/>
+            <a:r>
+              <a:rPr sz="645" b="0" i="0">
+                <a:solidFill>
+                  <a:srgbClr val="E8E8E8"/>
+                </a:solidFill>
+                <a:latin typeface="Arial"/>
+              </a:rPr>
+              <a:t>PC, VTOR, xPSR, stack and waveform signals become AI context</a:t>
+            </a:r>
+          </a:p>
+        </p:txBody>
+      </p:sp>
+      <p:sp>
+        <p:nvSpPr>
+          <p:cNvPr id="19" name="Rounded Rectangle 18"/>
+          <p:cNvSpPr/>
+          <p:nvPr/>
+        </p:nvSpPr>
+        <p:spPr>
+          <a:xfrm>
+            <a:off x="457200" y="3785616"/>
+            <a:ext cx="4407408" cy="475488"/>
+          </a:xfrm>
+          <a:prstGeom prst="roundRect">
+            <a:avLst/>
+          </a:prstGeom>
+          <a:solidFill>
+            <a:srgbClr val="333333"/>
+          </a:solidFill>
+          <a:ln w="13970">
+            <a:solidFill>
+              <a:srgbClr val="2E7D32"/>
+            </a:solidFill>
+          </a:ln>
+        </p:spPr>
+        <p:style>
+          <a:lnRef idx="1">
+            <a:schemeClr val="accent1"/>
+          </a:lnRef>
+          <a:fillRef idx="3">
+            <a:schemeClr val="accent1"/>
+          </a:fillRef>
+          <a:effectRef idx="2">
+            <a:schemeClr val="accent1"/>
+          </a:effectRef>
+          <a:fontRef idx="minor">
+            <a:schemeClr val="lt1"/>
+          </a:fontRef>
+        </p:style>
+        <p:txBody>
+          <a:bodyPr rtlCol="0" anchor="ctr"/>
+          <a:lstStyle/>
+          <a:p>
+            <a:pPr algn="ctr"/>
+          </a:p>
+        </p:txBody>
+      </p:sp>
+      <p:sp>
+        <p:nvSpPr>
+          <p:cNvPr id="20" name="TextBox 19"/>
+          <p:cNvSpPr txBox="1"/>
+          <p:nvPr/>
+        </p:nvSpPr>
+        <p:spPr>
+          <a:xfrm>
+            <a:off x="621792" y="3849624"/>
+            <a:ext cx="1600200" cy="109728"/>
+          </a:xfrm>
+          <a:prstGeom prst="rect">
+            <a:avLst/>
+          </a:prstGeom>
+          <a:noFill/>
+        </p:spPr>
+        <p:txBody>
+          <a:bodyPr wrap="square" lIns="18288" rIns="18288">
+            <a:spAutoFit/>
+          </a:bodyPr>
+          <a:lstStyle/>
+          <a:p>
+            <a:pPr algn="l"/>
+            <a:r>
+              <a:rPr sz="770" b="1" i="0">
+                <a:solidFill>
+                  <a:srgbClr val="FFFFFF"/>
+                </a:solidFill>
+                <a:latin typeface="Arial"/>
+              </a:rPr>
+              <a:t>PDLC impact loop</a:t>
+            </a:r>
+          </a:p>
+        </p:txBody>
+      </p:sp>
+      <p:sp>
+        <p:nvSpPr>
+          <p:cNvPr id="21" name="TextBox 20"/>
+          <p:cNvSpPr txBox="1"/>
+          <p:nvPr/>
+        </p:nvSpPr>
+        <p:spPr>
+          <a:xfrm>
+            <a:off x="2240280" y="3849624"/>
+            <a:ext cx="2423160" cy="146304"/>
+          </a:xfrm>
+          <a:prstGeom prst="rect">
+            <a:avLst/>
+          </a:prstGeom>
+          <a:noFill/>
+        </p:spPr>
+        <p:txBody>
+          <a:bodyPr wrap="square" lIns="18288" rIns="18288">
+            <a:spAutoFit/>
+          </a:bodyPr>
+          <a:lstStyle/>
+          <a:p>
+            <a:pPr algn="l"/>
+            <a:r>
+              <a:rPr sz="645" b="0" i="0">
+                <a:solidFill>
+                  <a:srgbClr val="E8E8E8"/>
+                </a:solidFill>
+                <a:latin typeface="Arial"/>
+              </a:rPr>
+              <a:t>Jira, Confluence, GitHub, Copilot and AEPLO gate decisions</a:t>
+            </a:r>
+          </a:p>
+        </p:txBody>
+      </p:sp>
+      <p:sp>
+        <p:nvSpPr>
+          <p:cNvPr id="22" name="Rounded Rectangle 21"/>
+          <p:cNvSpPr/>
+          <p:nvPr/>
+        </p:nvSpPr>
+        <p:spPr>
+          <a:xfrm>
+            <a:off x="457200" y="4645152"/>
+            <a:ext cx="530352" cy="246888"/>
+          </a:xfrm>
+          <a:prstGeom prst="roundRect">
+            <a:avLst/>
+          </a:prstGeom>
+          <a:solidFill>
+            <a:srgbClr val="2B2B2B"/>
+          </a:solidFill>
+          <a:ln w="13970">
+            <a:solidFill>
+              <a:srgbClr val="D71920"/>
+            </a:solidFill>
+          </a:ln>
+        </p:spPr>
+        <p:style>
+          <a:lnRef idx="1">
+            <a:schemeClr val="accent1"/>
+          </a:lnRef>
+          <a:fillRef idx="3">
+            <a:schemeClr val="accent1"/>
+          </a:fillRef>
+          <a:effectRef idx="2">
+            <a:schemeClr val="accent1"/>
+          </a:effectRef>
+          <a:fontRef idx="minor">
+            <a:schemeClr val="lt1"/>
+          </a:fontRef>
+        </p:style>
+        <p:txBody>
+          <a:bodyPr rtlCol="0" anchor="ctr"/>
+          <a:lstStyle/>
+          <a:p>
+            <a:pPr algn="ctr"/>
+          </a:p>
+        </p:txBody>
+      </p:sp>
+      <p:sp>
+        <p:nvSpPr>
+          <p:cNvPr id="23" name="TextBox 22"/>
+          <p:cNvSpPr txBox="1"/>
+          <p:nvPr/>
+        </p:nvSpPr>
+        <p:spPr>
+          <a:xfrm>
+            <a:off x="502920" y="4695444"/>
+            <a:ext cx="438912" cy="91440"/>
+          </a:xfrm>
+          <a:prstGeom prst="rect">
+            <a:avLst/>
+          </a:prstGeom>
+          <a:noFill/>
+        </p:spPr>
+        <p:txBody>
+          <a:bodyPr wrap="square" lIns="18288" rIns="18288">
+            <a:spAutoFit/>
+          </a:bodyPr>
+          <a:lstStyle/>
+          <a:p>
+            <a:pPr algn="ctr"/>
+            <a:r>
+              <a:rPr sz="720" b="1" i="0">
+                <a:solidFill>
+                  <a:srgbClr val="FFFFFF"/>
+                </a:solidFill>
+                <a:latin typeface="Arial"/>
+              </a:rPr>
+              <a:t>Jira</a:t>
+            </a:r>
+          </a:p>
+        </p:txBody>
+      </p:sp>
+      <p:sp>
+        <p:nvSpPr>
+          <p:cNvPr id="24" name="Rounded Rectangle 23"/>
+          <p:cNvSpPr/>
+          <p:nvPr/>
+        </p:nvSpPr>
+        <p:spPr>
+          <a:xfrm>
+            <a:off x="1088136" y="4645152"/>
+            <a:ext cx="530352" cy="246888"/>
+          </a:xfrm>
+          <a:prstGeom prst="roundRect">
+            <a:avLst/>
+          </a:prstGeom>
+          <a:solidFill>
+            <a:srgbClr val="2B2B2B"/>
+          </a:solidFill>
+          <a:ln w="13970">
+            <a:solidFill>
+              <a:srgbClr val="D71920"/>
+            </a:solidFill>
+          </a:ln>
+        </p:spPr>
+        <p:style>
+          <a:lnRef idx="1">
+            <a:schemeClr val="accent1"/>
+          </a:lnRef>
+          <a:fillRef idx="3">
+            <a:schemeClr val="accent1"/>
+          </a:fillRef>
+          <a:effectRef idx="2">
+            <a:schemeClr val="accent1"/>
+          </a:effectRef>
+          <a:fontRef idx="minor">
+            <a:schemeClr val="lt1"/>
+          </a:fontRef>
+        </p:style>
+        <p:txBody>
+          <a:bodyPr rtlCol="0" anchor="ctr"/>
+          <a:lstStyle/>
+          <a:p>
+            <a:pPr algn="ctr"/>
+          </a:p>
+        </p:txBody>
+      </p:sp>
+      <p:sp>
+        <p:nvSpPr>
+          <p:cNvPr id="25" name="TextBox 24"/>
+          <p:cNvSpPr txBox="1"/>
+          <p:nvPr/>
+        </p:nvSpPr>
+        <p:spPr>
+          <a:xfrm>
+            <a:off x="1133856" y="4695444"/>
+            <a:ext cx="438912" cy="91440"/>
+          </a:xfrm>
+          <a:prstGeom prst="rect">
+            <a:avLst/>
+          </a:prstGeom>
+          <a:noFill/>
+        </p:spPr>
+        <p:txBody>
+          <a:bodyPr wrap="square" lIns="18288" rIns="18288">
+            <a:spAutoFit/>
+          </a:bodyPr>
+          <a:lstStyle/>
+          <a:p>
+            <a:pPr algn="ctr"/>
+            <a:r>
+              <a:rPr sz="720" b="1" i="0">
+                <a:solidFill>
+                  <a:srgbClr val="FFFFFF"/>
+                </a:solidFill>
+                <a:latin typeface="Arial"/>
+              </a:rPr>
+              <a:t>Confluence</a:t>
+            </a:r>
+          </a:p>
+        </p:txBody>
+      </p:sp>
+      <p:sp>
+        <p:nvSpPr>
+          <p:cNvPr id="26" name="Rounded Rectangle 25"/>
+          <p:cNvSpPr/>
+          <p:nvPr/>
+        </p:nvSpPr>
+        <p:spPr>
+          <a:xfrm>
+            <a:off x="1719072" y="4645152"/>
+            <a:ext cx="530352" cy="246888"/>
+          </a:xfrm>
+          <a:prstGeom prst="roundRect">
+            <a:avLst/>
+          </a:prstGeom>
+          <a:solidFill>
+            <a:srgbClr val="2B2B2B"/>
+          </a:solidFill>
+          <a:ln w="13970">
+            <a:solidFill>
+              <a:srgbClr val="D71920"/>
+            </a:solidFill>
+          </a:ln>
+        </p:spPr>
+        <p:style>
+          <a:lnRef idx="1">
+            <a:schemeClr val="accent1"/>
+          </a:lnRef>
+          <a:fillRef idx="3">
+            <a:schemeClr val="accent1"/>
+          </a:fillRef>
+          <a:effectRef idx="2">
+            <a:schemeClr val="accent1"/>
+          </a:effectRef>
+          <a:fontRef idx="minor">
+            <a:schemeClr val="lt1"/>
+          </a:fontRef>
+        </p:style>
+        <p:txBody>
+          <a:bodyPr rtlCol="0" anchor="ctr"/>
+          <a:lstStyle/>
+          <a:p>
+            <a:pPr algn="ctr"/>
+          </a:p>
+        </p:txBody>
+      </p:sp>
+      <p:sp>
+        <p:nvSpPr>
+          <p:cNvPr id="27" name="TextBox 26"/>
+          <p:cNvSpPr txBox="1"/>
+          <p:nvPr/>
+        </p:nvSpPr>
+        <p:spPr>
+          <a:xfrm>
+            <a:off x="1764792" y="4695444"/>
+            <a:ext cx="438912" cy="91440"/>
+          </a:xfrm>
+          <a:prstGeom prst="rect">
+            <a:avLst/>
+          </a:prstGeom>
+          <a:noFill/>
+        </p:spPr>
+        <p:txBody>
+          <a:bodyPr wrap="square" lIns="18288" rIns="18288">
+            <a:spAutoFit/>
+          </a:bodyPr>
+          <a:lstStyle/>
+          <a:p>
+            <a:pPr algn="ctr"/>
+            <a:r>
+              <a:rPr sz="720" b="1" i="0">
+                <a:solidFill>
+                  <a:srgbClr val="FFFFFF"/>
+                </a:solidFill>
+                <a:latin typeface="Arial"/>
+              </a:rPr>
+              <a:t>GitHub</a:t>
+            </a:r>
+          </a:p>
+        </p:txBody>
+      </p:sp>
+      <p:sp>
+        <p:nvSpPr>
+          <p:cNvPr id="28" name="Rounded Rectangle 27"/>
+          <p:cNvSpPr/>
+          <p:nvPr/>
+        </p:nvSpPr>
+        <p:spPr>
+          <a:xfrm>
+            <a:off x="2350008" y="4645152"/>
+            <a:ext cx="530352" cy="246888"/>
+          </a:xfrm>
+          <a:prstGeom prst="roundRect">
+            <a:avLst/>
+          </a:prstGeom>
+          <a:solidFill>
+            <a:srgbClr val="2B2B2B"/>
+          </a:solidFill>
+          <a:ln w="13970">
+            <a:solidFill>
+              <a:srgbClr val="2E7D32"/>
+            </a:solidFill>
+          </a:ln>
+        </p:spPr>
+        <p:style>
+          <a:lnRef idx="1">
+            <a:schemeClr val="accent1"/>
+          </a:lnRef>
+          <a:fillRef idx="3">
+            <a:schemeClr val="accent1"/>
+          </a:fillRef>
+          <a:effectRef idx="2">
+            <a:schemeClr val="accent1"/>
+          </a:effectRef>
+          <a:fontRef idx="minor">
+            <a:schemeClr val="lt1"/>
+          </a:fontRef>
+        </p:style>
+        <p:txBody>
+          <a:bodyPr rtlCol="0" anchor="ctr"/>
+          <a:lstStyle/>
+          <a:p>
+            <a:pPr algn="ctr"/>
+          </a:p>
+        </p:txBody>
+      </p:sp>
+      <p:sp>
+        <p:nvSpPr>
+          <p:cNvPr id="29" name="TextBox 28"/>
+          <p:cNvSpPr txBox="1"/>
+          <p:nvPr/>
+        </p:nvSpPr>
+        <p:spPr>
+          <a:xfrm>
+            <a:off x="2395728" y="4695444"/>
+            <a:ext cx="438912" cy="91440"/>
+          </a:xfrm>
+          <a:prstGeom prst="rect">
+            <a:avLst/>
+          </a:prstGeom>
+          <a:noFill/>
+        </p:spPr>
+        <p:txBody>
+          <a:bodyPr wrap="square" lIns="18288" rIns="18288">
+            <a:spAutoFit/>
+          </a:bodyPr>
+          <a:lstStyle/>
+          <a:p>
+            <a:pPr algn="ctr"/>
+            <a:r>
+              <a:rPr sz="720" b="1" i="0">
+                <a:solidFill>
+                  <a:srgbClr val="FFFFFF"/>
+                </a:solidFill>
+                <a:latin typeface="Arial"/>
+              </a:rPr>
+              <a:t>Copilot</a:t>
+            </a:r>
+          </a:p>
+        </p:txBody>
+      </p:sp>
+      <p:sp>
+        <p:nvSpPr>
+          <p:cNvPr id="30" name="Rounded Rectangle 29"/>
+          <p:cNvSpPr/>
+          <p:nvPr/>
+        </p:nvSpPr>
+        <p:spPr>
+          <a:xfrm>
+            <a:off x="2980944" y="4645152"/>
+            <a:ext cx="530352" cy="246888"/>
+          </a:xfrm>
+          <a:prstGeom prst="roundRect">
+            <a:avLst/>
+          </a:prstGeom>
+          <a:solidFill>
+            <a:srgbClr val="2B2B2B"/>
+          </a:solidFill>
+          <a:ln w="13970">
+            <a:solidFill>
+              <a:srgbClr val="D71920"/>
+            </a:solidFill>
+          </a:ln>
+        </p:spPr>
+        <p:style>
+          <a:lnRef idx="1">
+            <a:schemeClr val="accent1"/>
+          </a:lnRef>
+          <a:fillRef idx="3">
+            <a:schemeClr val="accent1"/>
+          </a:fillRef>
+          <a:effectRef idx="2">
+            <a:schemeClr val="accent1"/>
+          </a:effectRef>
+          <a:fontRef idx="minor">
+            <a:schemeClr val="lt1"/>
+          </a:fontRef>
+        </p:style>
+        <p:txBody>
+          <a:bodyPr rtlCol="0" anchor="ctr"/>
+          <a:lstStyle/>
+          <a:p>
+            <a:pPr algn="ctr"/>
+          </a:p>
+        </p:txBody>
+      </p:sp>
+      <p:sp>
+        <p:nvSpPr>
+          <p:cNvPr id="31" name="TextBox 30"/>
+          <p:cNvSpPr txBox="1"/>
+          <p:nvPr/>
+        </p:nvSpPr>
+        <p:spPr>
+          <a:xfrm>
+            <a:off x="3026664" y="4695444"/>
+            <a:ext cx="438912" cy="91440"/>
+          </a:xfrm>
+          <a:prstGeom prst="rect">
+            <a:avLst/>
+          </a:prstGeom>
+          <a:noFill/>
+        </p:spPr>
+        <p:txBody>
+          <a:bodyPr wrap="square" lIns="18288" rIns="18288">
+            <a:spAutoFit/>
+          </a:bodyPr>
+          <a:lstStyle/>
+          <a:p>
+            <a:pPr algn="ctr"/>
+            <a:r>
+              <a:rPr sz="720" b="1" i="0">
+                <a:solidFill>
+                  <a:srgbClr val="FFFFFF"/>
+                </a:solidFill>
+                <a:latin typeface="Arial"/>
+              </a:rPr>
+              <a:t>ROVO</a:t>
+            </a:r>
+          </a:p>
+        </p:txBody>
+      </p:sp>
+      <p:sp>
+        <p:nvSpPr>
+          <p:cNvPr id="32" name="Rounded Rectangle 31"/>
+          <p:cNvSpPr/>
+          <p:nvPr/>
+        </p:nvSpPr>
+        <p:spPr>
+          <a:xfrm>
+            <a:off x="3611879" y="4645152"/>
+            <a:ext cx="530352" cy="246888"/>
+          </a:xfrm>
+          <a:prstGeom prst="roundRect">
+            <a:avLst/>
+          </a:prstGeom>
+          <a:solidFill>
+            <a:srgbClr val="2B2B2B"/>
+          </a:solidFill>
+          <a:ln w="13970">
+            <a:solidFill>
+              <a:srgbClr val="D71920"/>
+            </a:solidFill>
+          </a:ln>
+        </p:spPr>
+        <p:style>
+          <a:lnRef idx="1">
+            <a:schemeClr val="accent1"/>
+          </a:lnRef>
+          <a:fillRef idx="3">
+            <a:schemeClr val="accent1"/>
+          </a:fillRef>
+          <a:effectRef idx="2">
+            <a:schemeClr val="accent1"/>
+          </a:effectRef>
+          <a:fontRef idx="minor">
+            <a:schemeClr val="lt1"/>
+          </a:fontRef>
+        </p:style>
+        <p:txBody>
+          <a:bodyPr rtlCol="0" anchor="ctr"/>
+          <a:lstStyle/>
+          <a:p>
+            <a:pPr algn="ctr"/>
+          </a:p>
+        </p:txBody>
+      </p:sp>
+      <p:sp>
+        <p:nvSpPr>
+          <p:cNvPr id="33" name="TextBox 32"/>
+          <p:cNvSpPr txBox="1"/>
+          <p:nvPr/>
+        </p:nvSpPr>
+        <p:spPr>
+          <a:xfrm>
+            <a:off x="3657599" y="4695444"/>
+            <a:ext cx="438912" cy="91440"/>
+          </a:xfrm>
+          <a:prstGeom prst="rect">
+            <a:avLst/>
+          </a:prstGeom>
+          <a:noFill/>
+        </p:spPr>
+        <p:txBody>
+          <a:bodyPr wrap="square" lIns="18288" rIns="18288">
+            <a:spAutoFit/>
+          </a:bodyPr>
+          <a:lstStyle/>
+          <a:p>
+            <a:pPr algn="ctr"/>
+            <a:r>
+              <a:rPr sz="720" b="1" i="0">
+                <a:solidFill>
+                  <a:srgbClr val="FFFFFF"/>
+                </a:solidFill>
+                <a:latin typeface="Arial"/>
+              </a:rPr>
+              <a:t>MCP</a:t>
+            </a:r>
+          </a:p>
+        </p:txBody>
+      </p:sp>
+      <p:sp>
+        <p:nvSpPr>
+          <p:cNvPr id="34" name="Rounded Rectangle 33"/>
+          <p:cNvSpPr/>
+          <p:nvPr/>
+        </p:nvSpPr>
+        <p:spPr>
+          <a:xfrm>
+            <a:off x="4242816" y="4645152"/>
+            <a:ext cx="530352" cy="246888"/>
+          </a:xfrm>
+          <a:prstGeom prst="roundRect">
+            <a:avLst/>
+          </a:prstGeom>
+          <a:solidFill>
+            <a:srgbClr val="2B2B2B"/>
+          </a:solidFill>
+          <a:ln w="13970">
+            <a:solidFill>
+              <a:srgbClr val="2E7D32"/>
+            </a:solidFill>
+          </a:ln>
+        </p:spPr>
+        <p:style>
+          <a:lnRef idx="1">
+            <a:schemeClr val="accent1"/>
+          </a:lnRef>
+          <a:fillRef idx="3">
+            <a:schemeClr val="accent1"/>
+          </a:fillRef>
+          <a:effectRef idx="2">
+            <a:schemeClr val="accent1"/>
+          </a:effectRef>
+          <a:fontRef idx="minor">
+            <a:schemeClr val="lt1"/>
+          </a:fontRef>
+        </p:style>
+        <p:txBody>
+          <a:bodyPr rtlCol="0" anchor="ctr"/>
+          <a:lstStyle/>
+          <a:p>
+            <a:pPr algn="ctr"/>
+          </a:p>
+        </p:txBody>
+      </p:sp>
+      <p:sp>
+        <p:nvSpPr>
+          <p:cNvPr id="35" name="TextBox 34"/>
+          <p:cNvSpPr txBox="1"/>
+          <p:nvPr/>
+        </p:nvSpPr>
+        <p:spPr>
+          <a:xfrm>
+            <a:off x="4288536" y="4695444"/>
+            <a:ext cx="438912" cy="91440"/>
+          </a:xfrm>
+          <a:prstGeom prst="rect">
+            <a:avLst/>
+          </a:prstGeom>
+          <a:noFill/>
+        </p:spPr>
+        <p:txBody>
+          <a:bodyPr wrap="square" lIns="18288" rIns="18288">
+            <a:spAutoFit/>
+          </a:bodyPr>
+          <a:lstStyle/>
+          <a:p>
+            <a:pPr algn="ctr"/>
+            <a:r>
+              <a:rPr sz="720" b="1" i="0">
+                <a:solidFill>
+                  <a:srgbClr val="FFFFFF"/>
+                </a:solidFill>
+                <a:latin typeface="Arial"/>
+              </a:rPr>
+              <a:t>JTAG/SWD</a:t>
+            </a:r>
+          </a:p>
+        </p:txBody>
+      </p:sp>
+      <p:sp>
+        <p:nvSpPr>
+          <p:cNvPr id="36" name="TextBox 35"/>
+          <p:cNvSpPr txBox="1"/>
+          <p:nvPr/>
+        </p:nvSpPr>
+        <p:spPr>
+          <a:xfrm>
+            <a:off x="457200" y="5138928"/>
+            <a:ext cx="1371600" cy="128016"/>
+          </a:xfrm>
+          <a:prstGeom prst="rect">
+            <a:avLst/>
+          </a:prstGeom>
+          <a:noFill/>
+        </p:spPr>
+        <p:txBody>
+          <a:bodyPr wrap="square" lIns="18288" rIns="18288">
+            <a:spAutoFit/>
+          </a:bodyPr>
+          <a:lstStyle/>
+          <a:p>
+            <a:pPr algn="l"/>
+            <a:r>
+              <a:rPr sz="930" b="1" i="0">
+                <a:solidFill>
+                  <a:srgbClr val="D71920"/>
+                </a:solidFill>
+                <a:latin typeface="Arial"/>
+              </a:rPr>
+              <a:t>DEMO IMPACT</a:t>
+            </a:r>
+          </a:p>
+        </p:txBody>
+      </p:sp>
+      <p:sp>
+        <p:nvSpPr>
+          <p:cNvPr id="37" name="Rounded Rectangle 36"/>
+          <p:cNvSpPr/>
+          <p:nvPr/>
+        </p:nvSpPr>
+        <p:spPr>
+          <a:xfrm>
+            <a:off x="457200" y="5394960"/>
+            <a:ext cx="1051560" cy="566928"/>
+          </a:xfrm>
+          <a:prstGeom prst="roundRect">
+            <a:avLst/>
+          </a:prstGeom>
+          <a:solidFill>
+            <a:srgbClr val="111111"/>
+          </a:solidFill>
+          <a:ln w="13970">
+            <a:solidFill>
+              <a:srgbClr val="D71920"/>
+            </a:solidFill>
+          </a:ln>
+        </p:spPr>
+        <p:style>
+          <a:lnRef idx="1">
+            <a:schemeClr val="accent1"/>
+          </a:lnRef>
+          <a:fillRef idx="3">
+            <a:schemeClr val="accent1"/>
+          </a:fillRef>
+          <a:effectRef idx="2">
+            <a:schemeClr val="accent1"/>
+          </a:effectRef>
+          <a:fontRef idx="minor">
+            <a:schemeClr val="lt1"/>
+          </a:fontRef>
+        </p:style>
+        <p:txBody>
+          <a:bodyPr rtlCol="0" anchor="ctr"/>
+          <a:lstStyle/>
+          <a:p>
+            <a:pPr algn="ctr"/>
+          </a:p>
+        </p:txBody>
+      </p:sp>
+      <p:sp>
+        <p:nvSpPr>
+          <p:cNvPr id="38" name="TextBox 37"/>
+          <p:cNvSpPr txBox="1"/>
+          <p:nvPr/>
+        </p:nvSpPr>
+        <p:spPr>
+          <a:xfrm>
+            <a:off x="493776" y="5449824"/>
+            <a:ext cx="978408" cy="164592"/>
+          </a:xfrm>
+          <a:prstGeom prst="rect">
+            <a:avLst/>
+          </a:prstGeom>
+          <a:noFill/>
+        </p:spPr>
+        <p:txBody>
+          <a:bodyPr wrap="square" lIns="18288" rIns="18288">
+            <a:spAutoFit/>
+          </a:bodyPr>
+          <a:lstStyle/>
+          <a:p>
+            <a:pPr algn="ctr"/>
+            <a:r>
+              <a:rPr sz="1400" b="1" i="0">
+                <a:solidFill>
+                  <a:srgbClr val="D71920"/>
+                </a:solidFill>
+                <a:latin typeface="Arial"/>
+              </a:rPr>
+              <a:t>41%</a:t>
+            </a:r>
+          </a:p>
+        </p:txBody>
+      </p:sp>
+      <p:sp>
+        <p:nvSpPr>
+          <p:cNvPr id="39" name="TextBox 38"/>
+          <p:cNvSpPr txBox="1"/>
+          <p:nvPr/>
+        </p:nvSpPr>
+        <p:spPr>
+          <a:xfrm>
+            <a:off x="493776" y="5705856"/>
+            <a:ext cx="978408" cy="137160"/>
+          </a:xfrm>
+          <a:prstGeom prst="rect">
+            <a:avLst/>
+          </a:prstGeom>
+          <a:noFill/>
+        </p:spPr>
+        <p:txBody>
+          <a:bodyPr wrap="square" lIns="18288" rIns="18288">
+            <a:spAutoFit/>
+          </a:bodyPr>
+          <a:lstStyle/>
+          <a:p>
+            <a:pPr algn="ctr"/>
+            <a:r>
+              <a:rPr sz="570" b="0" i="0">
+                <a:solidFill>
+                  <a:srgbClr val="E8E8E8"/>
+                </a:solidFill>
+                <a:latin typeface="Arial"/>
+              </a:rPr>
+              <a:t>lead-time drop</a:t>
+            </a:r>
+          </a:p>
+        </p:txBody>
+      </p:sp>
+      <p:sp>
+        <p:nvSpPr>
+          <p:cNvPr id="40" name="Rounded Rectangle 39"/>
+          <p:cNvSpPr/>
+          <p:nvPr/>
+        </p:nvSpPr>
+        <p:spPr>
+          <a:xfrm>
+            <a:off x="1664208" y="5394960"/>
+            <a:ext cx="1051560" cy="566928"/>
+          </a:xfrm>
+          <a:prstGeom prst="roundRect">
+            <a:avLst/>
+          </a:prstGeom>
+          <a:solidFill>
+            <a:srgbClr val="111111"/>
+          </a:solidFill>
+          <a:ln w="13970">
+            <a:solidFill>
+              <a:srgbClr val="2E7D32"/>
+            </a:solidFill>
+          </a:ln>
+        </p:spPr>
+        <p:style>
+          <a:lnRef idx="1">
+            <a:schemeClr val="accent1"/>
+          </a:lnRef>
+          <a:fillRef idx="3">
+            <a:schemeClr val="accent1"/>
+          </a:fillRef>
+          <a:effectRef idx="2">
+            <a:schemeClr val="accent1"/>
+          </a:effectRef>
+          <a:fontRef idx="minor">
+            <a:schemeClr val="lt1"/>
+          </a:fontRef>
+        </p:style>
+        <p:txBody>
+          <a:bodyPr rtlCol="0" anchor="ctr"/>
+          <a:lstStyle/>
+          <a:p>
+            <a:pPr algn="ctr"/>
+          </a:p>
+        </p:txBody>
+      </p:sp>
+      <p:sp>
+        <p:nvSpPr>
+          <p:cNvPr id="41" name="TextBox 40"/>
+          <p:cNvSpPr txBox="1"/>
+          <p:nvPr/>
+        </p:nvSpPr>
+        <p:spPr>
+          <a:xfrm>
+            <a:off x="1700784" y="5449824"/>
+            <a:ext cx="978408" cy="164592"/>
+          </a:xfrm>
+          <a:prstGeom prst="rect">
+            <a:avLst/>
+          </a:prstGeom>
+          <a:noFill/>
+        </p:spPr>
+        <p:txBody>
+          <a:bodyPr wrap="square" lIns="18288" rIns="18288">
+            <a:spAutoFit/>
+          </a:bodyPr>
+          <a:lstStyle/>
+          <a:p>
+            <a:pPr algn="ctr"/>
+            <a:r>
+              <a:rPr sz="1400" b="1" i="0">
+                <a:solidFill>
+                  <a:srgbClr val="2E7D32"/>
+                </a:solidFill>
+                <a:latin typeface="Arial"/>
+              </a:rPr>
+              <a:t>60%</a:t>
+            </a:r>
+          </a:p>
+        </p:txBody>
+      </p:sp>
+      <p:sp>
+        <p:nvSpPr>
+          <p:cNvPr id="42" name="TextBox 41"/>
+          <p:cNvSpPr txBox="1"/>
+          <p:nvPr/>
+        </p:nvSpPr>
+        <p:spPr>
+          <a:xfrm>
+            <a:off x="1700784" y="5705856"/>
+            <a:ext cx="978408" cy="137160"/>
+          </a:xfrm>
+          <a:prstGeom prst="rect">
+            <a:avLst/>
+          </a:prstGeom>
+          <a:noFill/>
+        </p:spPr>
+        <p:txBody>
+          <a:bodyPr wrap="square" lIns="18288" rIns="18288">
+            <a:spAutoFit/>
+          </a:bodyPr>
+          <a:lstStyle/>
+          <a:p>
+            <a:pPr algn="ctr"/>
+            <a:r>
+              <a:rPr sz="570" b="0" i="0">
+                <a:solidFill>
+                  <a:srgbClr val="E8E8E8"/>
+                </a:solidFill>
+                <a:latin typeface="Arial"/>
+              </a:rPr>
+              <a:t>fewer escapes</a:t>
+            </a:r>
+          </a:p>
+        </p:txBody>
+      </p:sp>
+      <p:sp>
+        <p:nvSpPr>
+          <p:cNvPr id="43" name="Rounded Rectangle 42"/>
+          <p:cNvSpPr/>
+          <p:nvPr/>
+        </p:nvSpPr>
+        <p:spPr>
+          <a:xfrm>
+            <a:off x="2871216" y="5394960"/>
+            <a:ext cx="1051560" cy="566928"/>
+          </a:xfrm>
+          <a:prstGeom prst="roundRect">
+            <a:avLst/>
+          </a:prstGeom>
+          <a:solidFill>
+            <a:srgbClr val="111111"/>
+          </a:solidFill>
+          <a:ln w="13970">
+            <a:solidFill>
+              <a:srgbClr val="D71920"/>
+            </a:solidFill>
+          </a:ln>
+        </p:spPr>
+        <p:style>
+          <a:lnRef idx="1">
+            <a:schemeClr val="accent1"/>
+          </a:lnRef>
+          <a:fillRef idx="3">
+            <a:schemeClr val="accent1"/>
+          </a:fillRef>
+          <a:effectRef idx="2">
+            <a:schemeClr val="accent1"/>
+          </a:effectRef>
+          <a:fontRef idx="minor">
+            <a:schemeClr val="lt1"/>
+          </a:fontRef>
+        </p:style>
+        <p:txBody>
+          <a:bodyPr rtlCol="0" anchor="ctr"/>
+          <a:lstStyle/>
+          <a:p>
+            <a:pPr algn="ctr"/>
+          </a:p>
+        </p:txBody>
+      </p:sp>
+      <p:sp>
+        <p:nvSpPr>
+          <p:cNvPr id="44" name="TextBox 43"/>
+          <p:cNvSpPr txBox="1"/>
+          <p:nvPr/>
+        </p:nvSpPr>
+        <p:spPr>
+          <a:xfrm>
+            <a:off x="2907792" y="5449824"/>
+            <a:ext cx="978408" cy="164592"/>
+          </a:xfrm>
+          <a:prstGeom prst="rect">
+            <a:avLst/>
+          </a:prstGeom>
+          <a:noFill/>
+        </p:spPr>
+        <p:txBody>
+          <a:bodyPr wrap="square" lIns="18288" rIns="18288">
+            <a:spAutoFit/>
+          </a:bodyPr>
+          <a:lstStyle/>
+          <a:p>
+            <a:pPr algn="ctr"/>
+            <a:r>
+              <a:rPr sz="1400" b="1" i="0">
+                <a:solidFill>
+                  <a:srgbClr val="D71920"/>
+                </a:solidFill>
+                <a:latin typeface="Arial"/>
+              </a:rPr>
+              <a:t>92%</a:t>
+            </a:r>
+          </a:p>
+        </p:txBody>
+      </p:sp>
+      <p:sp>
+        <p:nvSpPr>
+          <p:cNvPr id="45" name="TextBox 44"/>
+          <p:cNvSpPr txBox="1"/>
+          <p:nvPr/>
+        </p:nvSpPr>
+        <p:spPr>
+          <a:xfrm>
+            <a:off x="2907792" y="5705856"/>
+            <a:ext cx="978408" cy="137160"/>
+          </a:xfrm>
+          <a:prstGeom prst="rect">
+            <a:avLst/>
+          </a:prstGeom>
+          <a:noFill/>
+        </p:spPr>
+        <p:txBody>
+          <a:bodyPr wrap="square" lIns="18288" rIns="18288">
+            <a:spAutoFit/>
+          </a:bodyPr>
+          <a:lstStyle/>
+          <a:p>
+            <a:pPr algn="ctr"/>
+            <a:r>
+              <a:rPr sz="570" b="0" i="0">
+                <a:solidFill>
+                  <a:srgbClr val="E8E8E8"/>
+                </a:solidFill>
+                <a:latin typeface="Arial"/>
+              </a:rPr>
+              <a:t>agent handoff</a:t>
+            </a:r>
+          </a:p>
+        </p:txBody>
+      </p:sp>
+      <p:sp>
+        <p:nvSpPr>
+          <p:cNvPr id="46" name="Rounded Rectangle 45"/>
+          <p:cNvSpPr/>
+          <p:nvPr/>
+        </p:nvSpPr>
+        <p:spPr>
+          <a:xfrm>
+            <a:off x="4078224" y="5394960"/>
+            <a:ext cx="1051560" cy="566928"/>
+          </a:xfrm>
+          <a:prstGeom prst="roundRect">
+            <a:avLst/>
+          </a:prstGeom>
+          <a:solidFill>
+            <a:srgbClr val="111111"/>
+          </a:solidFill>
+          <a:ln w="13970">
+            <a:solidFill>
+              <a:srgbClr val="2E7D32"/>
+            </a:solidFill>
+          </a:ln>
+        </p:spPr>
+        <p:style>
+          <a:lnRef idx="1">
+            <a:schemeClr val="accent1"/>
+          </a:lnRef>
+          <a:fillRef idx="3">
+            <a:schemeClr val="accent1"/>
+          </a:fillRef>
+          <a:effectRef idx="2">
+            <a:schemeClr val="accent1"/>
+          </a:effectRef>
+          <a:fontRef idx="minor">
+            <a:schemeClr val="lt1"/>
+          </a:fontRef>
+        </p:style>
+        <p:txBody>
+          <a:bodyPr rtlCol="0" anchor="ctr"/>
+          <a:lstStyle/>
+          <a:p>
+            <a:pPr algn="ctr"/>
+          </a:p>
+        </p:txBody>
+      </p:sp>
+      <p:sp>
+        <p:nvSpPr>
+          <p:cNvPr id="47" name="TextBox 46"/>
+          <p:cNvSpPr txBox="1"/>
+          <p:nvPr/>
+        </p:nvSpPr>
+        <p:spPr>
+          <a:xfrm>
+            <a:off x="4114800" y="5449824"/>
+            <a:ext cx="978408" cy="164592"/>
+          </a:xfrm>
+          <a:prstGeom prst="rect">
+            <a:avLst/>
+          </a:prstGeom>
+          <a:noFill/>
+        </p:spPr>
+        <p:txBody>
+          <a:bodyPr wrap="square" lIns="18288" rIns="18288">
+            <a:spAutoFit/>
+          </a:bodyPr>
+          <a:lstStyle/>
+          <a:p>
+            <a:pPr algn="ctr"/>
+            <a:r>
+              <a:rPr sz="1400" b="1" i="0">
+                <a:solidFill>
+                  <a:srgbClr val="2E7D32"/>
+                </a:solidFill>
+                <a:latin typeface="Arial"/>
+              </a:rPr>
+              <a:t>96%</a:t>
+            </a:r>
+          </a:p>
+        </p:txBody>
+      </p:sp>
+      <p:sp>
+        <p:nvSpPr>
+          <p:cNvPr id="48" name="TextBox 47"/>
+          <p:cNvSpPr txBox="1"/>
+          <p:nvPr/>
+        </p:nvSpPr>
+        <p:spPr>
+          <a:xfrm>
+            <a:off x="4114800" y="5705856"/>
+            <a:ext cx="978408" cy="137160"/>
+          </a:xfrm>
+          <a:prstGeom prst="rect">
+            <a:avLst/>
+          </a:prstGeom>
+          <a:noFill/>
+        </p:spPr>
+        <p:txBody>
+          <a:bodyPr wrap="square" lIns="18288" rIns="18288">
+            <a:spAutoFit/>
+          </a:bodyPr>
+          <a:lstStyle/>
+          <a:p>
+            <a:pPr algn="ctr"/>
+            <a:r>
+              <a:rPr sz="570" b="0" i="0">
+                <a:solidFill>
+                  <a:srgbClr val="E8E8E8"/>
+                </a:solidFill>
+                <a:latin typeface="Arial"/>
+              </a:rPr>
+              <a:t>JSON accuracy</a:t>
+            </a:r>
+          </a:p>
+        </p:txBody>
+      </p:sp>
+      <p:sp>
+        <p:nvSpPr>
+          <p:cNvPr id="49" name="Rounded Rectangle 48"/>
+          <p:cNvSpPr/>
+          <p:nvPr/>
+        </p:nvSpPr>
+        <p:spPr>
+          <a:xfrm>
+            <a:off x="5532120" y="347472"/>
+            <a:ext cx="6355080" cy="5650992"/>
+          </a:xfrm>
+          <a:prstGeom prst="roundRect">
+            <a:avLst/>
+          </a:prstGeom>
+          <a:solidFill>
+            <a:srgbClr val="141414"/>
+          </a:solidFill>
+          <a:ln w="13970">
+            <a:solidFill>
+              <a:srgbClr val="D71920"/>
+            </a:solidFill>
+          </a:ln>
+        </p:spPr>
+        <p:style>
+          <a:lnRef idx="1">
+            <a:schemeClr val="accent1"/>
+          </a:lnRef>
+          <a:fillRef idx="3">
+            <a:schemeClr val="accent1"/>
+          </a:fillRef>
+          <a:effectRef idx="2">
+            <a:schemeClr val="accent1"/>
+          </a:effectRef>
+          <a:fontRef idx="minor">
+            <a:schemeClr val="lt1"/>
+          </a:fontRef>
+        </p:style>
+        <p:txBody>
+          <a:bodyPr rtlCol="0" anchor="ctr"/>
+          <a:lstStyle/>
+          <a:p>
+            <a:pPr algn="ctr"/>
+          </a:p>
+        </p:txBody>
+      </p:sp>
+      <p:sp>
+        <p:nvSpPr>
+          <p:cNvPr id="50" name="TextBox 49"/>
+          <p:cNvSpPr txBox="1"/>
+          <p:nvPr/>
+        </p:nvSpPr>
+        <p:spPr>
+          <a:xfrm>
+            <a:off x="5742432" y="530352"/>
+            <a:ext cx="3383280" cy="146304"/>
+          </a:xfrm>
+          <a:prstGeom prst="rect">
+            <a:avLst/>
+          </a:prstGeom>
+          <a:noFill/>
+        </p:spPr>
+        <p:txBody>
+          <a:bodyPr wrap="square" lIns="18288" rIns="18288">
+            <a:spAutoFit/>
+          </a:bodyPr>
+          <a:lstStyle/>
+          <a:p>
+            <a:pPr algn="l"/>
+            <a:r>
+              <a:rPr sz="1100" b="1" i="0">
+                <a:solidFill>
+                  <a:srgbClr val="FFFFFF"/>
+                </a:solidFill>
+                <a:latin typeface="Arial"/>
+              </a:rPr>
+              <a:t>EMBEDDED DEBUG VISUAL STACK</a:t>
+            </a:r>
+          </a:p>
+        </p:txBody>
+      </p:sp>
+      <p:sp>
+        <p:nvSpPr>
+          <p:cNvPr id="51" name="TextBox 50"/>
+          <p:cNvSpPr txBox="1"/>
+          <p:nvPr/>
+        </p:nvSpPr>
+        <p:spPr>
+          <a:xfrm>
+            <a:off x="5742432" y="786384"/>
+            <a:ext cx="3840480" cy="109728"/>
+          </a:xfrm>
+          <a:prstGeom prst="rect">
+            <a:avLst/>
+          </a:prstGeom>
+          <a:noFill/>
+        </p:spPr>
+        <p:txBody>
+          <a:bodyPr wrap="square" lIns="18288" rIns="18288">
+            <a:spAutoFit/>
+          </a:bodyPr>
+          <a:lstStyle/>
+          <a:p>
+            <a:pPr algn="l"/>
+            <a:r>
+              <a:rPr sz="720" b="0" i="0">
+                <a:solidFill>
+                  <a:srgbClr val="E8E8E8"/>
+                </a:solidFill>
+                <a:latin typeface="Arial"/>
+              </a:rPr>
+              <a:t>SoC / MCU + PCB traces + JTAG probe + register evidence</a:t>
+            </a:r>
+          </a:p>
+        </p:txBody>
+      </p:sp>
+      <p:sp>
+        <p:nvSpPr>
+          <p:cNvPr id="52" name="TextBox 51"/>
+          <p:cNvSpPr txBox="1"/>
+          <p:nvPr/>
+        </p:nvSpPr>
+        <p:spPr>
+          <a:xfrm>
+            <a:off x="10149840" y="493776"/>
+            <a:ext cx="1417320" cy="164592"/>
+          </a:xfrm>
+          <a:prstGeom prst="rect">
+            <a:avLst/>
+          </a:prstGeom>
+          <a:noFill/>
+        </p:spPr>
+        <p:txBody>
+          <a:bodyPr wrap="square" lIns="18288" rIns="18288">
+            <a:spAutoFit/>
+          </a:bodyPr>
+          <a:lstStyle/>
+          <a:p>
+            <a:pPr algn="r"/>
+            <a:r>
+              <a:rPr sz="1300" b="1" i="0">
+                <a:solidFill>
+                  <a:srgbClr val="D71920"/>
+                </a:solidFill>
+                <a:latin typeface="Arial"/>
+              </a:rPr>
+              <a:t>HONEYWELL</a:t>
+            </a:r>
+          </a:p>
+        </p:txBody>
+      </p:sp>
       <p:pic>
         <p:nvPicPr>
-          <p:cNvPr id="3" name="Picture 2" descr="aeplo_honeywell_jtag_overlay.png"/>
+          <p:cNvPr id="53" name="Picture 52" descr="soc_mcu_explicit.png"/>
           <p:cNvPicPr>
             <a:picLocks noChangeAspect="1"/>
           </p:cNvPicPr>
@@ -3128,26 +5064,237 @@
         </p:blipFill>
         <p:spPr>
           <a:xfrm>
-            <a:off x="0" y="0"/>
-            <a:ext cx="12191999" cy="6858000"/>
+            <a:off x="5742432" y="1042415"/>
+            <a:ext cx="3840480" cy="2633472"/>
           </a:xfrm>
           <a:prstGeom prst="rect">
             <a:avLst/>
           </a:prstGeom>
         </p:spPr>
       </p:pic>
-      <p:sp>
-        <p:nvSpPr>
-          <p:cNvPr id="4" name="Rectangle 3"/>
+      <p:pic>
+        <p:nvPicPr>
+          <p:cNvPr id="54" name="Picture 53" descr="jtag_probe_header_explicit.png"/>
+          <p:cNvPicPr>
+            <a:picLocks noChangeAspect="1"/>
+          </p:cNvPicPr>
+          <p:nvPr/>
+        </p:nvPicPr>
+        <p:blipFill>
+          <a:blip r:embed="rId4"/>
+          <a:stretch>
+            <a:fillRect/>
+          </a:stretch>
+        </p:blipFill>
+        <p:spPr>
+          <a:xfrm>
+            <a:off x="9491472" y="1143000"/>
+            <a:ext cx="2176272" cy="914400"/>
+          </a:xfrm>
+          <a:prstGeom prst="rect">
+            <a:avLst/>
+          </a:prstGeom>
+        </p:spPr>
+      </p:pic>
+      <p:pic>
+        <p:nvPicPr>
+          <p:cNvPr id="55" name="Picture 54" descr="debug_waveforms_registers.png"/>
+          <p:cNvPicPr>
+            <a:picLocks noChangeAspect="1"/>
+          </p:cNvPicPr>
+          <p:nvPr/>
+        </p:nvPicPr>
+        <p:blipFill>
+          <a:blip r:embed="rId5"/>
+          <a:stretch>
+            <a:fillRect/>
+          </a:stretch>
+        </p:blipFill>
+        <p:spPr>
+          <a:xfrm>
+            <a:off x="5742432" y="3822191"/>
+            <a:ext cx="4370832" cy="1444752"/>
+          </a:xfrm>
+          <a:prstGeom prst="rect">
+            <a:avLst/>
+          </a:prstGeom>
+        </p:spPr>
+      </p:pic>
+      <p:sp>
+        <p:nvSpPr>
+          <p:cNvPr id="56" name="Rounded Rectangle 55"/>
           <p:cNvSpPr/>
           <p:nvPr/>
         </p:nvSpPr>
         <p:spPr>
           <a:xfrm>
-            <a:off x="0" y="0"/>
-            <a:ext cx="12191999" cy="73152"/>
+            <a:off x="9491472" y="2249424"/>
+            <a:ext cx="2176272" cy="1298448"/>
+          </a:xfrm>
+          <a:prstGeom prst="roundRect">
+            <a:avLst/>
+          </a:prstGeom>
+          <a:solidFill>
+            <a:srgbClr val="111111"/>
+          </a:solidFill>
+          <a:ln w="13970">
+            <a:solidFill>
+              <a:srgbClr val="D71920"/>
+            </a:solidFill>
+          </a:ln>
+        </p:spPr>
+        <p:style>
+          <a:lnRef idx="1">
+            <a:schemeClr val="accent1"/>
+          </a:lnRef>
+          <a:fillRef idx="3">
+            <a:schemeClr val="accent1"/>
+          </a:fillRef>
+          <a:effectRef idx="2">
+            <a:schemeClr val="accent1"/>
+          </a:effectRef>
+          <a:fontRef idx="minor">
+            <a:schemeClr val="lt1"/>
+          </a:fontRef>
+        </p:style>
+        <p:txBody>
+          <a:bodyPr rtlCol="0" anchor="ctr"/>
+          <a:lstStyle/>
+          <a:p>
+            <a:pPr algn="ctr"/>
+          </a:p>
+        </p:txBody>
+      </p:sp>
+      <p:sp>
+        <p:nvSpPr>
+          <p:cNvPr id="57" name="TextBox 56"/>
+          <p:cNvSpPr txBox="1"/>
+          <p:nvPr/>
+        </p:nvSpPr>
+        <p:spPr>
+          <a:xfrm>
+            <a:off x="9646920" y="2395728"/>
+            <a:ext cx="1847088" cy="109728"/>
           </a:xfrm>
           <a:prstGeom prst="rect">
+            <a:avLst/>
+          </a:prstGeom>
+          <a:noFill/>
+        </p:spPr>
+        <p:txBody>
+          <a:bodyPr wrap="square" lIns="18288" rIns="18288">
+            <a:spAutoFit/>
+          </a:bodyPr>
+          <a:lstStyle/>
+          <a:p>
+            <a:pPr algn="ctr"/>
+            <a:r>
+              <a:rPr sz="760" b="1" i="0">
+                <a:solidFill>
+                  <a:srgbClr val="D71920"/>
+                </a:solidFill>
+                <a:latin typeface="Arial"/>
+              </a:rPr>
+              <a:t>JTAG AGENT USE CASES</a:t>
+            </a:r>
+          </a:p>
+        </p:txBody>
+      </p:sp>
+      <p:sp>
+        <p:nvSpPr>
+          <p:cNvPr id="58" name="TextBox 57"/>
+          <p:cNvSpPr txBox="1"/>
+          <p:nvPr/>
+        </p:nvSpPr>
+        <p:spPr>
+          <a:xfrm>
+            <a:off x="9674352" y="2633472"/>
+            <a:ext cx="1810512" cy="502920"/>
+          </a:xfrm>
+          <a:prstGeom prst="rect">
+            <a:avLst/>
+          </a:prstGeom>
+          <a:noFill/>
+        </p:spPr>
+        <p:txBody>
+          <a:bodyPr wrap="square" lIns="18288" rIns="18288">
+            <a:spAutoFit/>
+          </a:bodyPr>
+          <a:lstStyle/>
+          <a:p>
+            <a:pPr algn="ctr"/>
+            <a:r>
+              <a:rPr sz="700" b="0" i="0">
+                <a:solidFill>
+                  <a:srgbClr val="E8E8E8"/>
+                </a:solidFill>
+                <a:latin typeface="Arial"/>
+              </a:rPr>
+              <a:t>HardFault RCA
+Cold ADC emulation
+Boot config trace
+Peripheral state proof</a:t>
+            </a:r>
+          </a:p>
+        </p:txBody>
+      </p:sp>
+      <p:sp>
+        <p:nvSpPr>
+          <p:cNvPr id="59" name="Rounded Rectangle 58"/>
+          <p:cNvSpPr/>
+          <p:nvPr/>
+        </p:nvSpPr>
+        <p:spPr>
+          <a:xfrm>
+            <a:off x="5742432" y="5413248"/>
+            <a:ext cx="5925312" cy="402336"/>
+          </a:xfrm>
+          <a:prstGeom prst="roundRect">
+            <a:avLst/>
+          </a:prstGeom>
+          <a:solidFill>
+            <a:srgbClr val="333333"/>
+          </a:solidFill>
+          <a:ln w="13970">
+            <a:solidFill>
+              <a:srgbClr val="2E7D32"/>
+            </a:solidFill>
+          </a:ln>
+        </p:spPr>
+        <p:style>
+          <a:lnRef idx="1">
+            <a:schemeClr val="accent1"/>
+          </a:lnRef>
+          <a:fillRef idx="3">
+            <a:schemeClr val="accent1"/>
+          </a:fillRef>
+          <a:effectRef idx="2">
+            <a:schemeClr val="accent1"/>
+          </a:effectRef>
+          <a:fontRef idx="minor">
+            <a:schemeClr val="lt1"/>
+          </a:fontRef>
+        </p:style>
+        <p:txBody>
+          <a:bodyPr rtlCol="0" anchor="ctr"/>
+          <a:lstStyle/>
+          <a:p>
+            <a:pPr algn="ctr"/>
+          </a:p>
+        </p:txBody>
+      </p:sp>
+      <p:sp>
+        <p:nvSpPr>
+          <p:cNvPr id="60" name="Rounded Rectangle 59"/>
+          <p:cNvSpPr/>
+          <p:nvPr/>
+        </p:nvSpPr>
+        <p:spPr>
+          <a:xfrm>
+            <a:off x="5989320" y="5522976"/>
+            <a:ext cx="530352" cy="182880"/>
+          </a:xfrm>
+          <a:prstGeom prst="roundRect">
             <a:avLst/>
           </a:prstGeom>
           <a:solidFill>
@@ -3181,20 +5328,125 @@
       </p:sp>
       <p:sp>
         <p:nvSpPr>
-          <p:cNvPr id="5" name="Rectangle 4"/>
+          <p:cNvPr id="61" name="TextBox 60"/>
+          <p:cNvSpPr txBox="1"/>
+          <p:nvPr/>
+        </p:nvSpPr>
+        <p:spPr>
+          <a:xfrm>
+            <a:off x="5989320" y="5564124"/>
+            <a:ext cx="530352" cy="64008"/>
+          </a:xfrm>
+          <a:prstGeom prst="rect">
+            <a:avLst/>
+          </a:prstGeom>
+          <a:noFill/>
+        </p:spPr>
+        <p:txBody>
+          <a:bodyPr wrap="square" lIns="18288" rIns="18288">
+            <a:spAutoFit/>
+          </a:bodyPr>
+          <a:lstStyle/>
+          <a:p>
+            <a:pPr algn="ctr"/>
+            <a:r>
+              <a:rPr sz="580" b="1" i="0">
+                <a:solidFill>
+                  <a:srgbClr val="FFFFFF"/>
+                </a:solidFill>
+                <a:latin typeface="Arial"/>
+              </a:rPr>
+              <a:t>PG1</a:t>
+            </a:r>
+          </a:p>
+        </p:txBody>
+      </p:sp>
+      <p:sp>
+        <p:nvSpPr>
+          <p:cNvPr id="62" name="TextBox 61"/>
+          <p:cNvSpPr txBox="1"/>
+          <p:nvPr/>
+        </p:nvSpPr>
+        <p:spPr>
+          <a:xfrm>
+            <a:off x="5916168" y="5742432"/>
+            <a:ext cx="676656" cy="54864"/>
+          </a:xfrm>
+          <a:prstGeom prst="rect">
+            <a:avLst/>
+          </a:prstGeom>
+          <a:noFill/>
+        </p:spPr>
+        <p:txBody>
+          <a:bodyPr wrap="square" lIns="18288" rIns="18288">
+            <a:spAutoFit/>
+          </a:bodyPr>
+          <a:lstStyle/>
+          <a:p>
+            <a:pPr algn="ctr"/>
+            <a:r>
+              <a:rPr sz="520" b="0" i="0">
+                <a:solidFill>
+                  <a:srgbClr val="E8E8E8"/>
+                </a:solidFill>
+                <a:latin typeface="Arial"/>
+              </a:rPr>
+              <a:t>risk</a:t>
+            </a:r>
+          </a:p>
+        </p:txBody>
+      </p:sp>
+      <p:sp>
+        <p:nvSpPr>
+          <p:cNvPr id="63" name="TextBox 62"/>
+          <p:cNvSpPr txBox="1"/>
+          <p:nvPr/>
+        </p:nvSpPr>
+        <p:spPr>
+          <a:xfrm>
+            <a:off x="6620256" y="5541264"/>
+            <a:ext cx="109728" cy="54864"/>
+          </a:xfrm>
+          <a:prstGeom prst="rect">
+            <a:avLst/>
+          </a:prstGeom>
+          <a:noFill/>
+        </p:spPr>
+        <p:txBody>
+          <a:bodyPr wrap="square" lIns="18288" rIns="18288">
+            <a:spAutoFit/>
+          </a:bodyPr>
+          <a:lstStyle/>
+          <a:p>
+            <a:pPr algn="l"/>
+            <a:r>
+              <a:rPr sz="780" b="1" i="0">
+                <a:solidFill>
+                  <a:srgbClr val="D71920"/>
+                </a:solidFill>
+                <a:latin typeface="Arial"/>
+              </a:rPr>
+              <a:t>&gt;</a:t>
+            </a:r>
+          </a:p>
+        </p:txBody>
+      </p:sp>
+      <p:sp>
+        <p:nvSpPr>
+          <p:cNvPr id="64" name="Rounded Rectangle 63"/>
           <p:cNvSpPr/>
           <p:nvPr/>
         </p:nvSpPr>
         <p:spPr>
           <a:xfrm>
-            <a:off x="0" y="6510528"/>
-            <a:ext cx="12191999" cy="347472"/>
-          </a:xfrm>
-          <a:prstGeom prst="rect">
+            <a:off x="7013448" y="5522976"/>
+            <a:ext cx="530352" cy="182880"/>
+          </a:xfrm>
+          <a:prstGeom prst="roundRect">
             <a:avLst/>
           </a:prstGeom>
           <a:solidFill>
-            <a:srgbClr val="F2F2F2"/>
+            <a:srgbClr val="2E7D32"/>
           </a:solidFill>
           <a:ln>
             <a:noFill/>
@@ -3224,104 +5476,14 @@
       </p:sp>
       <p:sp>
         <p:nvSpPr>
-          <p:cNvPr id="6" name="Rounded Rectangle 5"/>
-          <p:cNvSpPr/>
-          <p:nvPr/>
-        </p:nvSpPr>
-        <p:spPr>
-          <a:xfrm>
-            <a:off x="201168" y="137160"/>
-            <a:ext cx="8092440" cy="987552"/>
-          </a:xfrm>
-          <a:prstGeom prst="roundRect">
-            <a:avLst/>
-          </a:prstGeom>
-          <a:solidFill>
-            <a:srgbClr val="111111"/>
-          </a:solidFill>
-          <a:ln w="15240">
-            <a:solidFill>
-              <a:srgbClr val="D71920"/>
-            </a:solidFill>
-          </a:ln>
-        </p:spPr>
-        <p:style>
-          <a:lnRef idx="1">
-            <a:schemeClr val="accent1"/>
-          </a:lnRef>
-          <a:fillRef idx="3">
-            <a:schemeClr val="accent1"/>
-          </a:fillRef>
-          <a:effectRef idx="2">
-            <a:schemeClr val="accent1"/>
-          </a:effectRef>
-          <a:fontRef idx="minor">
-            <a:schemeClr val="lt1"/>
-          </a:fontRef>
-        </p:style>
-        <p:txBody>
-          <a:bodyPr rtlCol="0" anchor="ctr"/>
-          <a:lstStyle/>
-          <a:p>
-            <a:pPr algn="ctr"/>
-          </a:p>
-        </p:txBody>
-      </p:sp>
-      <p:sp>
-        <p:nvSpPr>
-          <p:cNvPr id="7" name="Rounded Rectangle 6"/>
-          <p:cNvSpPr/>
-          <p:nvPr/>
-        </p:nvSpPr>
-        <p:spPr>
-          <a:xfrm>
-            <a:off x="8458200" y="137160"/>
-            <a:ext cx="3493008" cy="987552"/>
-          </a:xfrm>
-          <a:prstGeom prst="roundRect">
-            <a:avLst/>
-          </a:prstGeom>
-          <a:solidFill>
-            <a:srgbClr val="2B2B2B"/>
-          </a:solidFill>
-          <a:ln w="15240">
-            <a:solidFill>
-              <a:srgbClr val="D71920"/>
-            </a:solidFill>
-          </a:ln>
-        </p:spPr>
-        <p:style>
-          <a:lnRef idx="1">
-            <a:schemeClr val="accent1"/>
-          </a:lnRef>
-          <a:fillRef idx="3">
-            <a:schemeClr val="accent1"/>
-          </a:fillRef>
-          <a:effectRef idx="2">
-            <a:schemeClr val="accent1"/>
-          </a:effectRef>
-          <a:fontRef idx="minor">
-            <a:schemeClr val="lt1"/>
-          </a:fontRef>
-        </p:style>
-        <p:txBody>
-          <a:bodyPr rtlCol="0" anchor="ctr"/>
-          <a:lstStyle/>
-          <a:p>
-            <a:pPr algn="ctr"/>
-          </a:p>
-        </p:txBody>
-      </p:sp>
-      <p:sp>
-        <p:nvSpPr>
-          <p:cNvPr id="8" name="TextBox 7"/>
+          <p:cNvPr id="65" name="TextBox 64"/>
           <p:cNvSpPr txBox="1"/>
           <p:nvPr/>
         </p:nvSpPr>
         <p:spPr>
           <a:xfrm>
-            <a:off x="310896" y="210312"/>
-            <a:ext cx="7680960" cy="320040"/>
+            <a:off x="7013448" y="5564124"/>
+            <a:ext cx="530352" cy="64008"/>
           </a:xfrm>
           <a:prstGeom prst="rect">
             <a:avLst/>
@@ -3329,34 +5491,34 @@
           <a:noFill/>
         </p:spPr>
         <p:txBody>
-          <a:bodyPr wrap="square" lIns="27432" rIns="27432">
+          <a:bodyPr wrap="square" lIns="18288" rIns="18288">
             <a:spAutoFit/>
           </a:bodyPr>
           <a:lstStyle/>
           <a:p>
-            <a:pPr algn="l"/>
-            <a:r>
-              <a:rPr sz="2100" b="1" i="0">
+            <a:pPr algn="ctr"/>
+            <a:r>
+              <a:rPr sz="580" b="1" i="0">
                 <a:solidFill>
                   <a:srgbClr val="FFFFFF"/>
                 </a:solidFill>
                 <a:latin typeface="Arial"/>
               </a:rPr>
-              <a:t>CONNECTED EMBEDDED DATA. INTELLIGENT PDLC ACTION.</a:t>
-            </a:r>
-          </a:p>
-        </p:txBody>
-      </p:sp>
-      <p:sp>
-        <p:nvSpPr>
-          <p:cNvPr id="9" name="TextBox 8"/>
+              <a:t>PG3</a:t>
+            </a:r>
+          </a:p>
+        </p:txBody>
+      </p:sp>
+      <p:sp>
+        <p:nvSpPr>
+          <p:cNvPr id="66" name="TextBox 65"/>
           <p:cNvSpPr txBox="1"/>
           <p:nvPr/>
         </p:nvSpPr>
         <p:spPr>
           <a:xfrm>
-            <a:off x="310896" y="548640"/>
-            <a:ext cx="7315200" cy="310896"/>
+            <a:off x="6940296" y="5742432"/>
+            <a:ext cx="676656" cy="54864"/>
           </a:xfrm>
           <a:prstGeom prst="rect">
             <a:avLst/>
@@ -3364,34 +5526,34 @@
           <a:noFill/>
         </p:spPr>
         <p:txBody>
-          <a:bodyPr wrap="square" lIns="27432" rIns="27432">
+          <a:bodyPr wrap="square" lIns="18288" rIns="18288">
             <a:spAutoFit/>
           </a:bodyPr>
           <a:lstStyle/>
           <a:p>
-            <a:pPr algn="l"/>
-            <a:r>
-              <a:rPr sz="1800" b="1" i="0">
-                <a:solidFill>
-                  <a:srgbClr val="D71920"/>
+            <a:pPr algn="ctr"/>
+            <a:r>
+              <a:rPr sz="520" b="0" i="0">
+                <a:solidFill>
+                  <a:srgbClr val="E8E8E8"/>
                 </a:solidFill>
                 <a:latin typeface="Arial"/>
               </a:rPr>
-              <a:t>REAL NPI IMPACT WITH AEPLO JTAG ACCELERATOR</a:t>
-            </a:r>
-          </a:p>
-        </p:txBody>
-      </p:sp>
-      <p:sp>
-        <p:nvSpPr>
-          <p:cNvPr id="10" name="TextBox 9"/>
+              <a:t>RCA</a:t>
+            </a:r>
+          </a:p>
+        </p:txBody>
+      </p:sp>
+      <p:sp>
+        <p:nvSpPr>
+          <p:cNvPr id="67" name="TextBox 66"/>
           <p:cNvSpPr txBox="1"/>
           <p:nvPr/>
         </p:nvSpPr>
         <p:spPr>
           <a:xfrm>
-            <a:off x="329184" y="877824"/>
-            <a:ext cx="7726679" cy="146304"/>
+            <a:off x="7644384" y="5541264"/>
+            <a:ext cx="109728" cy="54864"/>
           </a:xfrm>
           <a:prstGeom prst="rect">
             <a:avLst/>
@@ -3399,861 +5561,36 @@
           <a:noFill/>
         </p:spPr>
         <p:txBody>
-          <a:bodyPr wrap="square" lIns="27432" rIns="27432">
+          <a:bodyPr wrap="square" lIns="18288" rIns="18288">
             <a:spAutoFit/>
           </a:bodyPr>
           <a:lstStyle/>
           <a:p>
             <a:pPr algn="l"/>
             <a:r>
-              <a:rPr sz="790" b="0" i="0">
-                <a:solidFill>
-                  <a:srgbClr val="E8E8E8"/>
+              <a:rPr sz="780" b="1" i="0">
+                <a:solidFill>
+                  <a:srgbClr val="D71920"/>
                 </a:solidFill>
                 <a:latin typeface="Arial"/>
               </a:rPr>
-              <a:t>Jira + Confluence + GitHub + Copilot + ROVO Studio + Atlassian MCP + JTAG/SWD evidence in one embedded lifecycle loop.</a:t>
-            </a:r>
-          </a:p>
-        </p:txBody>
-      </p:sp>
-      <p:sp>
-        <p:nvSpPr>
-          <p:cNvPr id="11" name="TextBox 10"/>
-          <p:cNvSpPr txBox="1"/>
-          <p:nvPr/>
-        </p:nvSpPr>
-        <p:spPr>
-          <a:xfrm>
-            <a:off x="9966960" y="274320"/>
-            <a:ext cx="1600200" cy="228600"/>
-          </a:xfrm>
-          <a:prstGeom prst="rect">
-            <a:avLst/>
-          </a:prstGeom>
-          <a:noFill/>
-        </p:spPr>
-        <p:txBody>
-          <a:bodyPr wrap="square" lIns="27432" rIns="27432">
-            <a:spAutoFit/>
-          </a:bodyPr>
-          <a:lstStyle/>
-          <a:p>
-            <a:pPr algn="r"/>
-            <a:r>
-              <a:rPr sz="1500" b="1" i="0">
-                <a:solidFill>
-                  <a:srgbClr val="D71920"/>
-                </a:solidFill>
-                <a:latin typeface="Arial"/>
-              </a:rPr>
-              <a:t>HONEYWELL</a:t>
-            </a:r>
-          </a:p>
-        </p:txBody>
-      </p:sp>
-      <p:sp>
-        <p:nvSpPr>
-          <p:cNvPr id="12" name="TextBox 11"/>
-          <p:cNvSpPr txBox="1"/>
-          <p:nvPr/>
-        </p:nvSpPr>
-        <p:spPr>
-          <a:xfrm>
-            <a:off x="9985248" y="585216"/>
-            <a:ext cx="1581912" cy="164592"/>
-          </a:xfrm>
-          <a:prstGeom prst="rect">
-            <a:avLst/>
-          </a:prstGeom>
-          <a:noFill/>
-        </p:spPr>
-        <p:txBody>
-          <a:bodyPr wrap="square" lIns="27432" rIns="27432">
-            <a:spAutoFit/>
-          </a:bodyPr>
-          <a:lstStyle/>
-          <a:p>
-            <a:pPr algn="r"/>
-            <a:r>
-              <a:rPr sz="850" b="1" i="0">
-                <a:solidFill>
-                  <a:srgbClr val="FFFFFF"/>
-                </a:solidFill>
-                <a:latin typeface="Arial"/>
-              </a:rPr>
-              <a:t>BA BUILDATHON</a:t>
-            </a:r>
-          </a:p>
-        </p:txBody>
-      </p:sp>
-      <p:sp>
-        <p:nvSpPr>
-          <p:cNvPr id="13" name="TextBox 12"/>
-          <p:cNvSpPr txBox="1"/>
-          <p:nvPr/>
-        </p:nvSpPr>
-        <p:spPr>
-          <a:xfrm>
-            <a:off x="8823960" y="804672"/>
-            <a:ext cx="2724912" cy="146304"/>
-          </a:xfrm>
-          <a:prstGeom prst="rect">
-            <a:avLst/>
-          </a:prstGeom>
-          <a:noFill/>
-        </p:spPr>
-        <p:txBody>
-          <a:bodyPr wrap="square" lIns="27432" rIns="27432">
-            <a:spAutoFit/>
-          </a:bodyPr>
-          <a:lstStyle/>
-          <a:p>
-            <a:pPr algn="r"/>
-            <a:r>
-              <a:rPr sz="810" b="0" i="0">
-                <a:solidFill>
-                  <a:srgbClr val="E8E8E8"/>
-                </a:solidFill>
-                <a:latin typeface="Arial"/>
-              </a:rPr>
-              <a:t>Embedded. PDLC. AI Optimisation.</a:t>
-            </a:r>
-          </a:p>
-        </p:txBody>
-      </p:sp>
-      <p:sp>
-        <p:nvSpPr>
-          <p:cNvPr id="14" name="Rounded Rectangle 13"/>
+              <a:t>&gt;</a:t>
+            </a:r>
+          </a:p>
+        </p:txBody>
+      </p:sp>
+      <p:sp>
+        <p:nvSpPr>
+          <p:cNvPr id="68" name="Rounded Rectangle 67"/>
           <p:cNvSpPr/>
           <p:nvPr/>
         </p:nvSpPr>
         <p:spPr>
           <a:xfrm>
-            <a:off x="292608" y="1243584"/>
-            <a:ext cx="1389888" cy="256032"/>
+            <a:off x="8037575" y="5522976"/>
+            <a:ext cx="530352" cy="182880"/>
           </a:xfrm>
           <a:prstGeom prst="roundRect">
-            <a:avLst/>
-          </a:prstGeom>
-          <a:solidFill>
-            <a:srgbClr val="2B2B2B"/>
-          </a:solidFill>
-          <a:ln w="15240">
-            <a:solidFill>
-              <a:srgbClr val="D71920"/>
-            </a:solidFill>
-          </a:ln>
-        </p:spPr>
-        <p:style>
-          <a:lnRef idx="1">
-            <a:schemeClr val="accent1"/>
-          </a:lnRef>
-          <a:fillRef idx="3">
-            <a:schemeClr val="accent1"/>
-          </a:fillRef>
-          <a:effectRef idx="2">
-            <a:schemeClr val="accent1"/>
-          </a:effectRef>
-          <a:fontRef idx="minor">
-            <a:schemeClr val="lt1"/>
-          </a:fontRef>
-        </p:style>
-        <p:txBody>
-          <a:bodyPr rtlCol="0" anchor="ctr"/>
-          <a:lstStyle/>
-          <a:p>
-            <a:pPr algn="ctr"/>
-          </a:p>
-        </p:txBody>
-      </p:sp>
-      <p:sp>
-        <p:nvSpPr>
-          <p:cNvPr id="15" name="TextBox 14"/>
-          <p:cNvSpPr txBox="1"/>
-          <p:nvPr/>
-        </p:nvSpPr>
-        <p:spPr>
-          <a:xfrm>
-            <a:off x="347472" y="1293876"/>
-            <a:ext cx="1280160" cy="109728"/>
-          </a:xfrm>
-          <a:prstGeom prst="rect">
-            <a:avLst/>
-          </a:prstGeom>
-          <a:noFill/>
-        </p:spPr>
-        <p:txBody>
-          <a:bodyPr wrap="square" lIns="27432" rIns="27432">
-            <a:spAutoFit/>
-          </a:bodyPr>
-          <a:lstStyle/>
-          <a:p>
-            <a:pPr algn="ctr"/>
-            <a:r>
-              <a:rPr sz="780" b="1" i="0">
-                <a:solidFill>
-                  <a:srgbClr val="FFFFFF"/>
-                </a:solidFill>
-                <a:latin typeface="Arial"/>
-              </a:rPr>
-              <a:t>ROVO Studio</a:t>
-            </a:r>
-          </a:p>
-        </p:txBody>
-      </p:sp>
-      <p:sp>
-        <p:nvSpPr>
-          <p:cNvPr id="16" name="Rounded Rectangle 15"/>
-          <p:cNvSpPr/>
-          <p:nvPr/>
-        </p:nvSpPr>
-        <p:spPr>
-          <a:xfrm>
-            <a:off x="1975104" y="1243584"/>
-            <a:ext cx="1389888" cy="256032"/>
-          </a:xfrm>
-          <a:prstGeom prst="roundRect">
-            <a:avLst/>
-          </a:prstGeom>
-          <a:solidFill>
-            <a:srgbClr val="2B2B2B"/>
-          </a:solidFill>
-          <a:ln w="15240">
-            <a:solidFill>
-              <a:srgbClr val="2E7D32"/>
-            </a:solidFill>
-          </a:ln>
-        </p:spPr>
-        <p:style>
-          <a:lnRef idx="1">
-            <a:schemeClr val="accent1"/>
-          </a:lnRef>
-          <a:fillRef idx="3">
-            <a:schemeClr val="accent1"/>
-          </a:fillRef>
-          <a:effectRef idx="2">
-            <a:schemeClr val="accent1"/>
-          </a:effectRef>
-          <a:fontRef idx="minor">
-            <a:schemeClr val="lt1"/>
-          </a:fontRef>
-        </p:style>
-        <p:txBody>
-          <a:bodyPr rtlCol="0" anchor="ctr"/>
-          <a:lstStyle/>
-          <a:p>
-            <a:pPr algn="ctr"/>
-          </a:p>
-        </p:txBody>
-      </p:sp>
-      <p:sp>
-        <p:nvSpPr>
-          <p:cNvPr id="17" name="TextBox 16"/>
-          <p:cNvSpPr txBox="1"/>
-          <p:nvPr/>
-        </p:nvSpPr>
-        <p:spPr>
-          <a:xfrm>
-            <a:off x="2029968" y="1293876"/>
-            <a:ext cx="1280160" cy="109728"/>
-          </a:xfrm>
-          <a:prstGeom prst="rect">
-            <a:avLst/>
-          </a:prstGeom>
-          <a:noFill/>
-        </p:spPr>
-        <p:txBody>
-          <a:bodyPr wrap="square" lIns="27432" rIns="27432">
-            <a:spAutoFit/>
-          </a:bodyPr>
-          <a:lstStyle/>
-          <a:p>
-            <a:pPr algn="ctr"/>
-            <a:r>
-              <a:rPr sz="780" b="1" i="0">
-                <a:solidFill>
-                  <a:srgbClr val="FFFFFF"/>
-                </a:solidFill>
-                <a:latin typeface="Arial"/>
-              </a:rPr>
-              <a:t>Copilot</a:t>
-            </a:r>
-          </a:p>
-        </p:txBody>
-      </p:sp>
-      <p:sp>
-        <p:nvSpPr>
-          <p:cNvPr id="18" name="Rounded Rectangle 17"/>
-          <p:cNvSpPr/>
-          <p:nvPr/>
-        </p:nvSpPr>
-        <p:spPr>
-          <a:xfrm>
-            <a:off x="3657600" y="1243584"/>
-            <a:ext cx="1389888" cy="256032"/>
-          </a:xfrm>
-          <a:prstGeom prst="roundRect">
-            <a:avLst/>
-          </a:prstGeom>
-          <a:solidFill>
-            <a:srgbClr val="2B2B2B"/>
-          </a:solidFill>
-          <a:ln w="15240">
-            <a:solidFill>
-              <a:srgbClr val="D71920"/>
-            </a:solidFill>
-          </a:ln>
-        </p:spPr>
-        <p:style>
-          <a:lnRef idx="1">
-            <a:schemeClr val="accent1"/>
-          </a:lnRef>
-          <a:fillRef idx="3">
-            <a:schemeClr val="accent1"/>
-          </a:fillRef>
-          <a:effectRef idx="2">
-            <a:schemeClr val="accent1"/>
-          </a:effectRef>
-          <a:fontRef idx="minor">
-            <a:schemeClr val="lt1"/>
-          </a:fontRef>
-        </p:style>
-        <p:txBody>
-          <a:bodyPr rtlCol="0" anchor="ctr"/>
-          <a:lstStyle/>
-          <a:p>
-            <a:pPr algn="ctr"/>
-          </a:p>
-        </p:txBody>
-      </p:sp>
-      <p:sp>
-        <p:nvSpPr>
-          <p:cNvPr id="19" name="TextBox 18"/>
-          <p:cNvSpPr txBox="1"/>
-          <p:nvPr/>
-        </p:nvSpPr>
-        <p:spPr>
-          <a:xfrm>
-            <a:off x="3712464" y="1293876"/>
-            <a:ext cx="1280160" cy="109728"/>
-          </a:xfrm>
-          <a:prstGeom prst="rect">
-            <a:avLst/>
-          </a:prstGeom>
-          <a:noFill/>
-        </p:spPr>
-        <p:txBody>
-          <a:bodyPr wrap="square" lIns="27432" rIns="27432">
-            <a:spAutoFit/>
-          </a:bodyPr>
-          <a:lstStyle/>
-          <a:p>
-            <a:pPr algn="ctr"/>
-            <a:r>
-              <a:rPr sz="780" b="1" i="0">
-                <a:solidFill>
-                  <a:srgbClr val="FFFFFF"/>
-                </a:solidFill>
-                <a:latin typeface="Arial"/>
-              </a:rPr>
-              <a:t>Atlassian MCP</a:t>
-            </a:r>
-          </a:p>
-        </p:txBody>
-      </p:sp>
-      <p:sp>
-        <p:nvSpPr>
-          <p:cNvPr id="20" name="Rounded Rectangle 19"/>
-          <p:cNvSpPr/>
-          <p:nvPr/>
-        </p:nvSpPr>
-        <p:spPr>
-          <a:xfrm>
-            <a:off x="5340096" y="1243584"/>
-            <a:ext cx="1389888" cy="256032"/>
-          </a:xfrm>
-          <a:prstGeom prst="roundRect">
-            <a:avLst/>
-          </a:prstGeom>
-          <a:solidFill>
-            <a:srgbClr val="2B2B2B"/>
-          </a:solidFill>
-          <a:ln w="15240">
-            <a:solidFill>
-              <a:srgbClr val="FFFFFF"/>
-            </a:solidFill>
-          </a:ln>
-        </p:spPr>
-        <p:style>
-          <a:lnRef idx="1">
-            <a:schemeClr val="accent1"/>
-          </a:lnRef>
-          <a:fillRef idx="3">
-            <a:schemeClr val="accent1"/>
-          </a:fillRef>
-          <a:effectRef idx="2">
-            <a:schemeClr val="accent1"/>
-          </a:effectRef>
-          <a:fontRef idx="minor">
-            <a:schemeClr val="lt1"/>
-          </a:fontRef>
-        </p:style>
-        <p:txBody>
-          <a:bodyPr rtlCol="0" anchor="ctr"/>
-          <a:lstStyle/>
-          <a:p>
-            <a:pPr algn="ctr"/>
-          </a:p>
-        </p:txBody>
-      </p:sp>
-      <p:sp>
-        <p:nvSpPr>
-          <p:cNvPr id="21" name="TextBox 20"/>
-          <p:cNvSpPr txBox="1"/>
-          <p:nvPr/>
-        </p:nvSpPr>
-        <p:spPr>
-          <a:xfrm>
-            <a:off x="5394960" y="1293876"/>
-            <a:ext cx="1280160" cy="109728"/>
-          </a:xfrm>
-          <a:prstGeom prst="rect">
-            <a:avLst/>
-          </a:prstGeom>
-          <a:noFill/>
-        </p:spPr>
-        <p:txBody>
-          <a:bodyPr wrap="square" lIns="27432" rIns="27432">
-            <a:spAutoFit/>
-          </a:bodyPr>
-          <a:lstStyle/>
-          <a:p>
-            <a:pPr algn="ctr"/>
-            <a:r>
-              <a:rPr sz="780" b="1" i="0">
-                <a:solidFill>
-                  <a:srgbClr val="FFFFFF"/>
-                </a:solidFill>
-                <a:latin typeface="Arial"/>
-              </a:rPr>
-              <a:t>GitHub</a:t>
-            </a:r>
-          </a:p>
-        </p:txBody>
-      </p:sp>
-      <p:sp>
-        <p:nvSpPr>
-          <p:cNvPr id="22" name="Rounded Rectangle 21"/>
-          <p:cNvSpPr/>
-          <p:nvPr/>
-        </p:nvSpPr>
-        <p:spPr>
-          <a:xfrm>
-            <a:off x="7022592" y="1243584"/>
-            <a:ext cx="1389888" cy="256032"/>
-          </a:xfrm>
-          <a:prstGeom prst="roundRect">
-            <a:avLst/>
-          </a:prstGeom>
-          <a:solidFill>
-            <a:srgbClr val="2B2B2B"/>
-          </a:solidFill>
-          <a:ln w="15240">
-            <a:solidFill>
-              <a:srgbClr val="D71920"/>
-            </a:solidFill>
-          </a:ln>
-        </p:spPr>
-        <p:style>
-          <a:lnRef idx="1">
-            <a:schemeClr val="accent1"/>
-          </a:lnRef>
-          <a:fillRef idx="3">
-            <a:schemeClr val="accent1"/>
-          </a:fillRef>
-          <a:effectRef idx="2">
-            <a:schemeClr val="accent1"/>
-          </a:effectRef>
-          <a:fontRef idx="minor">
-            <a:schemeClr val="lt1"/>
-          </a:fontRef>
-        </p:style>
-        <p:txBody>
-          <a:bodyPr rtlCol="0" anchor="ctr"/>
-          <a:lstStyle/>
-          <a:p>
-            <a:pPr algn="ctr"/>
-          </a:p>
-        </p:txBody>
-      </p:sp>
-      <p:sp>
-        <p:nvSpPr>
-          <p:cNvPr id="23" name="TextBox 22"/>
-          <p:cNvSpPr txBox="1"/>
-          <p:nvPr/>
-        </p:nvSpPr>
-        <p:spPr>
-          <a:xfrm>
-            <a:off x="7077456" y="1293876"/>
-            <a:ext cx="1280160" cy="109728"/>
-          </a:xfrm>
-          <a:prstGeom prst="rect">
-            <a:avLst/>
-          </a:prstGeom>
-          <a:noFill/>
-        </p:spPr>
-        <p:txBody>
-          <a:bodyPr wrap="square" lIns="27432" rIns="27432">
-            <a:spAutoFit/>
-          </a:bodyPr>
-          <a:lstStyle/>
-          <a:p>
-            <a:pPr algn="ctr"/>
-            <a:r>
-              <a:rPr sz="780" b="1" i="0">
-                <a:solidFill>
-                  <a:srgbClr val="FFFFFF"/>
-                </a:solidFill>
-                <a:latin typeface="Arial"/>
-              </a:rPr>
-              <a:t>Jira</a:t>
-            </a:r>
-          </a:p>
-        </p:txBody>
-      </p:sp>
-      <p:sp>
-        <p:nvSpPr>
-          <p:cNvPr id="24" name="Rounded Rectangle 23"/>
-          <p:cNvSpPr/>
-          <p:nvPr/>
-        </p:nvSpPr>
-        <p:spPr>
-          <a:xfrm>
-            <a:off x="8705088" y="1243584"/>
-            <a:ext cx="1389888" cy="256032"/>
-          </a:xfrm>
-          <a:prstGeom prst="roundRect">
-            <a:avLst/>
-          </a:prstGeom>
-          <a:solidFill>
-            <a:srgbClr val="2B2B2B"/>
-          </a:solidFill>
-          <a:ln w="15240">
-            <a:solidFill>
-              <a:srgbClr val="D71920"/>
-            </a:solidFill>
-          </a:ln>
-        </p:spPr>
-        <p:style>
-          <a:lnRef idx="1">
-            <a:schemeClr val="accent1"/>
-          </a:lnRef>
-          <a:fillRef idx="3">
-            <a:schemeClr val="accent1"/>
-          </a:fillRef>
-          <a:effectRef idx="2">
-            <a:schemeClr val="accent1"/>
-          </a:effectRef>
-          <a:fontRef idx="minor">
-            <a:schemeClr val="lt1"/>
-          </a:fontRef>
-        </p:style>
-        <p:txBody>
-          <a:bodyPr rtlCol="0" anchor="ctr"/>
-          <a:lstStyle/>
-          <a:p>
-            <a:pPr algn="ctr"/>
-          </a:p>
-        </p:txBody>
-      </p:sp>
-      <p:sp>
-        <p:nvSpPr>
-          <p:cNvPr id="25" name="TextBox 24"/>
-          <p:cNvSpPr txBox="1"/>
-          <p:nvPr/>
-        </p:nvSpPr>
-        <p:spPr>
-          <a:xfrm>
-            <a:off x="8759952" y="1293876"/>
-            <a:ext cx="1280160" cy="109728"/>
-          </a:xfrm>
-          <a:prstGeom prst="rect">
-            <a:avLst/>
-          </a:prstGeom>
-          <a:noFill/>
-        </p:spPr>
-        <p:txBody>
-          <a:bodyPr wrap="square" lIns="27432" rIns="27432">
-            <a:spAutoFit/>
-          </a:bodyPr>
-          <a:lstStyle/>
-          <a:p>
-            <a:pPr algn="ctr"/>
-            <a:r>
-              <a:rPr sz="780" b="1" i="0">
-                <a:solidFill>
-                  <a:srgbClr val="FFFFFF"/>
-                </a:solidFill>
-                <a:latin typeface="Arial"/>
-              </a:rPr>
-              <a:t>Confluence</a:t>
-            </a:r>
-          </a:p>
-        </p:txBody>
-      </p:sp>
-      <p:sp>
-        <p:nvSpPr>
-          <p:cNvPr id="26" name="Rounded Rectangle 25"/>
-          <p:cNvSpPr/>
-          <p:nvPr/>
-        </p:nvSpPr>
-        <p:spPr>
-          <a:xfrm>
-            <a:off x="10387584" y="1243584"/>
-            <a:ext cx="1389888" cy="256032"/>
-          </a:xfrm>
-          <a:prstGeom prst="roundRect">
-            <a:avLst/>
-          </a:prstGeom>
-          <a:solidFill>
-            <a:srgbClr val="2B2B2B"/>
-          </a:solidFill>
-          <a:ln w="15240">
-            <a:solidFill>
-              <a:srgbClr val="2E7D32"/>
-            </a:solidFill>
-          </a:ln>
-        </p:spPr>
-        <p:style>
-          <a:lnRef idx="1">
-            <a:schemeClr val="accent1"/>
-          </a:lnRef>
-          <a:fillRef idx="3">
-            <a:schemeClr val="accent1"/>
-          </a:fillRef>
-          <a:effectRef idx="2">
-            <a:schemeClr val="accent1"/>
-          </a:effectRef>
-          <a:fontRef idx="minor">
-            <a:schemeClr val="lt1"/>
-          </a:fontRef>
-        </p:style>
-        <p:txBody>
-          <a:bodyPr rtlCol="0" anchor="ctr"/>
-          <a:lstStyle/>
-          <a:p>
-            <a:pPr algn="ctr"/>
-          </a:p>
-        </p:txBody>
-      </p:sp>
-      <p:sp>
-        <p:nvSpPr>
-          <p:cNvPr id="27" name="TextBox 26"/>
-          <p:cNvSpPr txBox="1"/>
-          <p:nvPr/>
-        </p:nvSpPr>
-        <p:spPr>
-          <a:xfrm>
-            <a:off x="10442448" y="1293876"/>
-            <a:ext cx="1280160" cy="109728"/>
-          </a:xfrm>
-          <a:prstGeom prst="rect">
-            <a:avLst/>
-          </a:prstGeom>
-          <a:noFill/>
-        </p:spPr>
-        <p:txBody>
-          <a:bodyPr wrap="square" lIns="27432" rIns="27432">
-            <a:spAutoFit/>
-          </a:bodyPr>
-          <a:lstStyle/>
-          <a:p>
-            <a:pPr algn="ctr"/>
-            <a:r>
-              <a:rPr sz="780" b="1" i="0">
-                <a:solidFill>
-                  <a:srgbClr val="FFFFFF"/>
-                </a:solidFill>
-                <a:latin typeface="Arial"/>
-              </a:rPr>
-              <a:t>JTAG/SWD</a:t>
-            </a:r>
-          </a:p>
-        </p:txBody>
-      </p:sp>
-      <p:sp>
-        <p:nvSpPr>
-          <p:cNvPr id="28" name="Rounded Rectangle 27"/>
-          <p:cNvSpPr/>
-          <p:nvPr/>
-        </p:nvSpPr>
-        <p:spPr>
-          <a:xfrm>
-            <a:off x="256032" y="1700784"/>
-            <a:ext cx="11686032" cy="3566160"/>
-          </a:xfrm>
-          <a:prstGeom prst="roundRect">
-            <a:avLst/>
-          </a:prstGeom>
-          <a:solidFill>
-            <a:srgbClr val="1A1A1A"/>
-          </a:solidFill>
-          <a:ln w="15240">
-            <a:solidFill>
-              <a:srgbClr val="D71920"/>
-            </a:solidFill>
-          </a:ln>
-        </p:spPr>
-        <p:style>
-          <a:lnRef idx="1">
-            <a:schemeClr val="accent1"/>
-          </a:lnRef>
-          <a:fillRef idx="3">
-            <a:schemeClr val="accent1"/>
-          </a:fillRef>
-          <a:effectRef idx="2">
-            <a:schemeClr val="accent1"/>
-          </a:effectRef>
-          <a:fontRef idx="minor">
-            <a:schemeClr val="lt1"/>
-          </a:fontRef>
-        </p:style>
-        <p:txBody>
-          <a:bodyPr rtlCol="0" anchor="ctr"/>
-          <a:lstStyle/>
-          <a:p>
-            <a:pPr algn="ctr"/>
-          </a:p>
-        </p:txBody>
-      </p:sp>
-      <p:sp>
-        <p:nvSpPr>
-          <p:cNvPr id="29" name="TextBox 28"/>
-          <p:cNvSpPr txBox="1"/>
-          <p:nvPr/>
-        </p:nvSpPr>
-        <p:spPr>
-          <a:xfrm>
-            <a:off x="438912" y="1847088"/>
-            <a:ext cx="8046720" cy="182880"/>
-          </a:xfrm>
-          <a:prstGeom prst="rect">
-            <a:avLst/>
-          </a:prstGeom>
-          <a:noFill/>
-        </p:spPr>
-        <p:txBody>
-          <a:bodyPr wrap="square" lIns="27432" rIns="27432">
-            <a:spAutoFit/>
-          </a:bodyPr>
-          <a:lstStyle/>
-          <a:p>
-            <a:pPr algn="l"/>
-            <a:r>
-              <a:rPr sz="1120" b="1" i="0">
-                <a:solidFill>
-                  <a:srgbClr val="FFFFFF"/>
-                </a:solidFill>
-                <a:latin typeface="Arial"/>
-              </a:rPr>
-              <a:t>ONE AEPLO PLATFORM: FROM NPI SIGNALS TO DEBUG EVIDENCE TO GATE DECISIONS</a:t>
-            </a:r>
-          </a:p>
-        </p:txBody>
-      </p:sp>
-      <p:sp>
-        <p:nvSpPr>
-          <p:cNvPr id="30" name="TextBox 29"/>
-          <p:cNvSpPr txBox="1"/>
-          <p:nvPr/>
-        </p:nvSpPr>
-        <p:spPr>
-          <a:xfrm>
-            <a:off x="457200" y="2084831"/>
-            <a:ext cx="7498079" cy="164592"/>
-          </a:xfrm>
-          <a:prstGeom prst="rect">
-            <a:avLst/>
-          </a:prstGeom>
-          <a:noFill/>
-        </p:spPr>
-        <p:txBody>
-          <a:bodyPr wrap="square" lIns="27432" rIns="27432">
-            <a:spAutoFit/>
-          </a:bodyPr>
-          <a:lstStyle/>
-          <a:p>
-            <a:pPr algn="l"/>
-            <a:r>
-              <a:rPr sz="819" b="0" i="0">
-                <a:solidFill>
-                  <a:srgbClr val="B8B8B8"/>
-                </a:solidFill>
-                <a:latin typeface="Arial"/>
-              </a:rPr>
-              <a:t>Designed for embedded PDLC teams that need traceable, hardware-backed decisions from PG1 discovery through PG5 launch prep.</a:t>
-            </a:r>
-          </a:p>
-        </p:txBody>
-      </p:sp>
-      <p:sp>
-        <p:nvSpPr>
-          <p:cNvPr id="31" name="Rounded Rectangle 30"/>
-          <p:cNvSpPr/>
-          <p:nvPr/>
-        </p:nvSpPr>
-        <p:spPr>
-          <a:xfrm>
-            <a:off x="438912" y="2432304"/>
-            <a:ext cx="2130552" cy="1993392"/>
-          </a:xfrm>
-          <a:prstGeom prst="roundRect">
-            <a:avLst/>
-          </a:prstGeom>
-          <a:solidFill>
-            <a:srgbClr val="333333"/>
-          </a:solidFill>
-          <a:ln w="15240">
-            <a:solidFill>
-              <a:srgbClr val="D71920"/>
-            </a:solidFill>
-          </a:ln>
-        </p:spPr>
-        <p:style>
-          <a:lnRef idx="1">
-            <a:schemeClr val="accent1"/>
-          </a:lnRef>
-          <a:fillRef idx="3">
-            <a:schemeClr val="accent1"/>
-          </a:fillRef>
-          <a:effectRef idx="2">
-            <a:schemeClr val="accent1"/>
-          </a:effectRef>
-          <a:fontRef idx="minor">
-            <a:schemeClr val="lt1"/>
-          </a:fontRef>
-        </p:style>
-        <p:txBody>
-          <a:bodyPr rtlCol="0" anchor="ctr"/>
-          <a:lstStyle/>
-          <a:p>
-            <a:pPr algn="ctr"/>
-          </a:p>
-        </p:txBody>
-      </p:sp>
-      <p:sp>
-        <p:nvSpPr>
-          <p:cNvPr id="32" name="Rectangle 31"/>
-          <p:cNvSpPr/>
-          <p:nvPr/>
-        </p:nvSpPr>
-        <p:spPr>
-          <a:xfrm>
-            <a:off x="438912" y="2432304"/>
-            <a:ext cx="2130552" cy="54864"/>
-          </a:xfrm>
-          <a:prstGeom prst="rect">
             <a:avLst/>
           </a:prstGeom>
           <a:solidFill>
@@ -4287,14 +5624,267 @@
       </p:sp>
       <p:sp>
         <p:nvSpPr>
-          <p:cNvPr id="33" name="Rounded Rectangle 32"/>
+          <p:cNvPr id="69" name="TextBox 68"/>
+          <p:cNvSpPr txBox="1"/>
+          <p:nvPr/>
+        </p:nvSpPr>
+        <p:spPr>
+          <a:xfrm>
+            <a:off x="8037575" y="5564124"/>
+            <a:ext cx="530352" cy="64008"/>
+          </a:xfrm>
+          <a:prstGeom prst="rect">
+            <a:avLst/>
+          </a:prstGeom>
+          <a:noFill/>
+        </p:spPr>
+        <p:txBody>
+          <a:bodyPr wrap="square" lIns="18288" rIns="18288">
+            <a:spAutoFit/>
+          </a:bodyPr>
+          <a:lstStyle/>
+          <a:p>
+            <a:pPr algn="ctr"/>
+            <a:r>
+              <a:rPr sz="580" b="1" i="0">
+                <a:solidFill>
+                  <a:srgbClr val="FFFFFF"/>
+                </a:solidFill>
+                <a:latin typeface="Arial"/>
+              </a:rPr>
+              <a:t>PR</a:t>
+            </a:r>
+          </a:p>
+        </p:txBody>
+      </p:sp>
+      <p:sp>
+        <p:nvSpPr>
+          <p:cNvPr id="70" name="TextBox 69"/>
+          <p:cNvSpPr txBox="1"/>
+          <p:nvPr/>
+        </p:nvSpPr>
+        <p:spPr>
+          <a:xfrm>
+            <a:off x="7964423" y="5742432"/>
+            <a:ext cx="676656" cy="54864"/>
+          </a:xfrm>
+          <a:prstGeom prst="rect">
+            <a:avLst/>
+          </a:prstGeom>
+          <a:noFill/>
+        </p:spPr>
+        <p:txBody>
+          <a:bodyPr wrap="square" lIns="18288" rIns="18288">
+            <a:spAutoFit/>
+          </a:bodyPr>
+          <a:lstStyle/>
+          <a:p>
+            <a:pPr algn="ctr"/>
+            <a:r>
+              <a:rPr sz="520" b="0" i="0">
+                <a:solidFill>
+                  <a:srgbClr val="E8E8E8"/>
+                </a:solidFill>
+                <a:latin typeface="Arial"/>
+              </a:rPr>
+              <a:t>fix</a:t>
+            </a:r>
+          </a:p>
+        </p:txBody>
+      </p:sp>
+      <p:sp>
+        <p:nvSpPr>
+          <p:cNvPr id="71" name="TextBox 70"/>
+          <p:cNvSpPr txBox="1"/>
+          <p:nvPr/>
+        </p:nvSpPr>
+        <p:spPr>
+          <a:xfrm>
+            <a:off x="8668511" y="5541264"/>
+            <a:ext cx="109728" cy="54864"/>
+          </a:xfrm>
+          <a:prstGeom prst="rect">
+            <a:avLst/>
+          </a:prstGeom>
+          <a:noFill/>
+        </p:spPr>
+        <p:txBody>
+          <a:bodyPr wrap="square" lIns="18288" rIns="18288">
+            <a:spAutoFit/>
+          </a:bodyPr>
+          <a:lstStyle/>
+          <a:p>
+            <a:pPr algn="l"/>
+            <a:r>
+              <a:rPr sz="780" b="1" i="0">
+                <a:solidFill>
+                  <a:srgbClr val="D71920"/>
+                </a:solidFill>
+                <a:latin typeface="Arial"/>
+              </a:rPr>
+              <a:t>&gt;</a:t>
+            </a:r>
+          </a:p>
+        </p:txBody>
+      </p:sp>
+      <p:sp>
+        <p:nvSpPr>
+          <p:cNvPr id="72" name="Rounded Rectangle 71"/>
           <p:cNvSpPr/>
           <p:nvPr/>
         </p:nvSpPr>
         <p:spPr>
           <a:xfrm>
-            <a:off x="557784" y="2596896"/>
-            <a:ext cx="347472" cy="347472"/>
+            <a:off x="9061704" y="5522976"/>
+            <a:ext cx="530352" cy="182880"/>
+          </a:xfrm>
+          <a:prstGeom prst="roundRect">
+            <a:avLst/>
+          </a:prstGeom>
+          <a:solidFill>
+            <a:srgbClr val="2E7D32"/>
+          </a:solidFill>
+          <a:ln>
+            <a:noFill/>
+          </a:ln>
+        </p:spPr>
+        <p:style>
+          <a:lnRef idx="1">
+            <a:schemeClr val="accent1"/>
+          </a:lnRef>
+          <a:fillRef idx="3">
+            <a:schemeClr val="accent1"/>
+          </a:fillRef>
+          <a:effectRef idx="2">
+            <a:schemeClr val="accent1"/>
+          </a:effectRef>
+          <a:fontRef idx="minor">
+            <a:schemeClr val="lt1"/>
+          </a:fontRef>
+        </p:style>
+        <p:txBody>
+          <a:bodyPr rtlCol="0" anchor="ctr"/>
+          <a:lstStyle/>
+          <a:p>
+            <a:pPr algn="ctr"/>
+          </a:p>
+        </p:txBody>
+      </p:sp>
+      <p:sp>
+        <p:nvSpPr>
+          <p:cNvPr id="73" name="TextBox 72"/>
+          <p:cNvSpPr txBox="1"/>
+          <p:nvPr/>
+        </p:nvSpPr>
+        <p:spPr>
+          <a:xfrm>
+            <a:off x="9061704" y="5564124"/>
+            <a:ext cx="530352" cy="64008"/>
+          </a:xfrm>
+          <a:prstGeom prst="rect">
+            <a:avLst/>
+          </a:prstGeom>
+          <a:noFill/>
+        </p:spPr>
+        <p:txBody>
+          <a:bodyPr wrap="square" lIns="18288" rIns="18288">
+            <a:spAutoFit/>
+          </a:bodyPr>
+          <a:lstStyle/>
+          <a:p>
+            <a:pPr algn="ctr"/>
+            <a:r>
+              <a:rPr sz="580" b="1" i="0">
+                <a:solidFill>
+                  <a:srgbClr val="FFFFFF"/>
+                </a:solidFill>
+                <a:latin typeface="Arial"/>
+              </a:rPr>
+              <a:t>PG5</a:t>
+            </a:r>
+          </a:p>
+        </p:txBody>
+      </p:sp>
+      <p:sp>
+        <p:nvSpPr>
+          <p:cNvPr id="74" name="TextBox 73"/>
+          <p:cNvSpPr txBox="1"/>
+          <p:nvPr/>
+        </p:nvSpPr>
+        <p:spPr>
+          <a:xfrm>
+            <a:off x="8988552" y="5742432"/>
+            <a:ext cx="676656" cy="54864"/>
+          </a:xfrm>
+          <a:prstGeom prst="rect">
+            <a:avLst/>
+          </a:prstGeom>
+          <a:noFill/>
+        </p:spPr>
+        <p:txBody>
+          <a:bodyPr wrap="square" lIns="18288" rIns="18288">
+            <a:spAutoFit/>
+          </a:bodyPr>
+          <a:lstStyle/>
+          <a:p>
+            <a:pPr algn="ctr"/>
+            <a:r>
+              <a:rPr sz="520" b="0" i="0">
+                <a:solidFill>
+                  <a:srgbClr val="E8E8E8"/>
+                </a:solidFill>
+                <a:latin typeface="Arial"/>
+              </a:rPr>
+              <a:t>gate</a:t>
+            </a:r>
+          </a:p>
+        </p:txBody>
+      </p:sp>
+      <p:sp>
+        <p:nvSpPr>
+          <p:cNvPr id="75" name="TextBox 74"/>
+          <p:cNvSpPr txBox="1"/>
+          <p:nvPr/>
+        </p:nvSpPr>
+        <p:spPr>
+          <a:xfrm>
+            <a:off x="9692640" y="5541264"/>
+            <a:ext cx="109728" cy="54864"/>
+          </a:xfrm>
+          <a:prstGeom prst="rect">
+            <a:avLst/>
+          </a:prstGeom>
+          <a:noFill/>
+        </p:spPr>
+        <p:txBody>
+          <a:bodyPr wrap="square" lIns="18288" rIns="18288">
+            <a:spAutoFit/>
+          </a:bodyPr>
+          <a:lstStyle/>
+          <a:p>
+            <a:pPr algn="l"/>
+            <a:r>
+              <a:rPr sz="780" b="1" i="0">
+                <a:solidFill>
+                  <a:srgbClr val="D71920"/>
+                </a:solidFill>
+                <a:latin typeface="Arial"/>
+              </a:rPr>
+              <a:t>&gt;</a:t>
+            </a:r>
+          </a:p>
+        </p:txBody>
+      </p:sp>
+      <p:sp>
+        <p:nvSpPr>
+          <p:cNvPr id="76" name="Rounded Rectangle 75"/>
+          <p:cNvSpPr/>
+          <p:nvPr/>
+        </p:nvSpPr>
+        <p:spPr>
+          <a:xfrm>
+            <a:off x="10085832" y="5522976"/>
+            <a:ext cx="530352" cy="182880"/>
           </a:xfrm>
           <a:prstGeom prst="roundRect">
             <a:avLst/>
@@ -4330,14 +5920,14 @@
       </p:sp>
       <p:sp>
         <p:nvSpPr>
-          <p:cNvPr id="34" name="TextBox 33"/>
+          <p:cNvPr id="77" name="TextBox 76"/>
           <p:cNvSpPr txBox="1"/>
           <p:nvPr/>
         </p:nvSpPr>
         <p:spPr>
           <a:xfrm>
-            <a:off x="557784" y="2660904"/>
-            <a:ext cx="347472" cy="91440"/>
+            <a:off x="10085832" y="5564124"/>
+            <a:ext cx="530352" cy="64008"/>
           </a:xfrm>
           <a:prstGeom prst="rect">
             <a:avLst/>
@@ -4345,34 +5935,34 @@
           <a:noFill/>
         </p:spPr>
         <p:txBody>
-          <a:bodyPr wrap="square" lIns="27432" rIns="27432">
+          <a:bodyPr wrap="square" lIns="18288" rIns="18288">
             <a:spAutoFit/>
           </a:bodyPr>
           <a:lstStyle/>
           <a:p>
             <a:pPr algn="ctr"/>
             <a:r>
-              <a:rPr sz="850" b="1" i="0">
+              <a:rPr sz="580" b="1" i="0">
                 <a:solidFill>
                   <a:srgbClr val="FFFFFF"/>
                 </a:solidFill>
                 <a:latin typeface="Arial"/>
               </a:rPr>
-              <a:t>1</a:t>
-            </a:r>
-          </a:p>
-        </p:txBody>
-      </p:sp>
-      <p:sp>
-        <p:nvSpPr>
-          <p:cNvPr id="35" name="TextBox 34"/>
+              <a:t>QA</a:t>
+            </a:r>
+          </a:p>
+        </p:txBody>
+      </p:sp>
+      <p:sp>
+        <p:nvSpPr>
+          <p:cNvPr id="78" name="TextBox 77"/>
           <p:cNvSpPr txBox="1"/>
           <p:nvPr/>
         </p:nvSpPr>
         <p:spPr>
           <a:xfrm>
-            <a:off x="987552" y="2578608"/>
-            <a:ext cx="1444752" cy="329184"/>
+            <a:off x="10012680" y="5742432"/>
+            <a:ext cx="676656" cy="54864"/>
           </a:xfrm>
           <a:prstGeom prst="rect">
             <a:avLst/>
@@ -4380,356 +5970,34 @@
           <a:noFill/>
         </p:spPr>
         <p:txBody>
-          <a:bodyPr wrap="square" lIns="27432" rIns="27432">
+          <a:bodyPr wrap="square" lIns="18288" rIns="18288">
             <a:spAutoFit/>
           </a:bodyPr>
           <a:lstStyle/>
           <a:p>
-            <a:pPr algn="l"/>
-            <a:r>
-              <a:rPr sz="950" b="1" i="0">
-                <a:solidFill>
-                  <a:srgbClr val="FFFFFF"/>
+            <a:pPr algn="ctr"/>
+            <a:r>
+              <a:rPr sz="520" b="0" i="0">
+                <a:solidFill>
+                  <a:srgbClr val="E8E8E8"/>
                 </a:solidFill>
                 <a:latin typeface="Arial"/>
               </a:rPr>
-              <a:t>EMBEDDED DATA SOURCES</a:t>
-            </a:r>
-          </a:p>
-        </p:txBody>
-      </p:sp>
-      <p:sp>
-        <p:nvSpPr>
-          <p:cNvPr id="36" name="TextBox 35"/>
-          <p:cNvSpPr txBox="1"/>
-          <p:nvPr/>
-        </p:nvSpPr>
-        <p:spPr>
-          <a:xfrm>
-            <a:off x="603504" y="3127248"/>
-            <a:ext cx="1810512" cy="1051560"/>
-          </a:xfrm>
-          <a:prstGeom prst="rect">
-            <a:avLst/>
-          </a:prstGeom>
-          <a:noFill/>
-        </p:spPr>
-        <p:txBody>
-          <a:bodyPr wrap="square" lIns="27432" rIns="27432">
-            <a:spAutoFit/>
-          </a:bodyPr>
-          <a:lstStyle/>
-          <a:p>
-            <a:pPr algn="l"/>
-            <a:r>
-              <a:rPr sz="740" b="0" i="0">
-                <a:solidFill>
-                  <a:srgbClr val="E8E8E8"/>
-                </a:solidFill>
-                <a:latin typeface="Arial"/>
-              </a:rPr>
-              <a:t>Jira defects and NPI epics
-Confluence PRD and architecture
-GitHub code, PRs and reviews
-JTAG/SWD register evidence</a:t>
-            </a:r>
-          </a:p>
-        </p:txBody>
-      </p:sp>
-      <p:sp>
-        <p:nvSpPr>
-          <p:cNvPr id="37" name="Rounded Rectangle 36"/>
+              <a:t>learn</a:t>
+            </a:r>
+          </a:p>
+        </p:txBody>
+      </p:sp>
+      <p:sp>
+        <p:nvSpPr>
+          <p:cNvPr id="79" name="Rectangle 78"/>
           <p:cNvSpPr/>
           <p:nvPr/>
         </p:nvSpPr>
         <p:spPr>
           <a:xfrm>
-            <a:off x="2743200" y="2432304"/>
-            <a:ext cx="2130552" cy="1993392"/>
-          </a:xfrm>
-          <a:prstGeom prst="roundRect">
-            <a:avLst/>
-          </a:prstGeom>
-          <a:solidFill>
-            <a:srgbClr val="333333"/>
-          </a:solidFill>
-          <a:ln w="15240">
-            <a:solidFill>
-              <a:srgbClr val="646464"/>
-            </a:solidFill>
-          </a:ln>
-        </p:spPr>
-        <p:style>
-          <a:lnRef idx="1">
-            <a:schemeClr val="accent1"/>
-          </a:lnRef>
-          <a:fillRef idx="3">
-            <a:schemeClr val="accent1"/>
-          </a:fillRef>
-          <a:effectRef idx="2">
-            <a:schemeClr val="accent1"/>
-          </a:effectRef>
-          <a:fontRef idx="minor">
-            <a:schemeClr val="lt1"/>
-          </a:fontRef>
-        </p:style>
-        <p:txBody>
-          <a:bodyPr rtlCol="0" anchor="ctr"/>
-          <a:lstStyle/>
-          <a:p>
-            <a:pPr algn="ctr"/>
-          </a:p>
-        </p:txBody>
-      </p:sp>
-      <p:sp>
-        <p:nvSpPr>
-          <p:cNvPr id="38" name="Rectangle 37"/>
-          <p:cNvSpPr/>
-          <p:nvPr/>
-        </p:nvSpPr>
-        <p:spPr>
-          <a:xfrm>
-            <a:off x="2743200" y="2432304"/>
-            <a:ext cx="2130552" cy="54864"/>
-          </a:xfrm>
-          <a:prstGeom prst="rect">
-            <a:avLst/>
-          </a:prstGeom>
-          <a:solidFill>
-            <a:srgbClr val="646464"/>
-          </a:solidFill>
-          <a:ln>
-            <a:noFill/>
-          </a:ln>
-        </p:spPr>
-        <p:style>
-          <a:lnRef idx="1">
-            <a:schemeClr val="accent1"/>
-          </a:lnRef>
-          <a:fillRef idx="3">
-            <a:schemeClr val="accent1"/>
-          </a:fillRef>
-          <a:effectRef idx="2">
-            <a:schemeClr val="accent1"/>
-          </a:effectRef>
-          <a:fontRef idx="minor">
-            <a:schemeClr val="lt1"/>
-          </a:fontRef>
-        </p:style>
-        <p:txBody>
-          <a:bodyPr rtlCol="0" anchor="ctr"/>
-          <a:lstStyle/>
-          <a:p>
-            <a:pPr algn="ctr"/>
-          </a:p>
-        </p:txBody>
-      </p:sp>
-      <p:sp>
-        <p:nvSpPr>
-          <p:cNvPr id="39" name="Rounded Rectangle 38"/>
-          <p:cNvSpPr/>
-          <p:nvPr/>
-        </p:nvSpPr>
-        <p:spPr>
-          <a:xfrm>
-            <a:off x="2862072" y="2596896"/>
-            <a:ext cx="347472" cy="347472"/>
-          </a:xfrm>
-          <a:prstGeom prst="roundRect">
-            <a:avLst/>
-          </a:prstGeom>
-          <a:solidFill>
-            <a:srgbClr val="646464"/>
-          </a:solidFill>
-          <a:ln>
-            <a:noFill/>
-          </a:ln>
-        </p:spPr>
-        <p:style>
-          <a:lnRef idx="1">
-            <a:schemeClr val="accent1"/>
-          </a:lnRef>
-          <a:fillRef idx="3">
-            <a:schemeClr val="accent1"/>
-          </a:fillRef>
-          <a:effectRef idx="2">
-            <a:schemeClr val="accent1"/>
-          </a:effectRef>
-          <a:fontRef idx="minor">
-            <a:schemeClr val="lt1"/>
-          </a:fontRef>
-        </p:style>
-        <p:txBody>
-          <a:bodyPr rtlCol="0" anchor="ctr"/>
-          <a:lstStyle/>
-          <a:p>
-            <a:pPr algn="ctr"/>
-          </a:p>
-        </p:txBody>
-      </p:sp>
-      <p:sp>
-        <p:nvSpPr>
-          <p:cNvPr id="40" name="TextBox 39"/>
-          <p:cNvSpPr txBox="1"/>
-          <p:nvPr/>
-        </p:nvSpPr>
-        <p:spPr>
-          <a:xfrm>
-            <a:off x="2862072" y="2660904"/>
-            <a:ext cx="347472" cy="91440"/>
-          </a:xfrm>
-          <a:prstGeom prst="rect">
-            <a:avLst/>
-          </a:prstGeom>
-          <a:noFill/>
-        </p:spPr>
-        <p:txBody>
-          <a:bodyPr wrap="square" lIns="27432" rIns="27432">
-            <a:spAutoFit/>
-          </a:bodyPr>
-          <a:lstStyle/>
-          <a:p>
-            <a:pPr algn="ctr"/>
-            <a:r>
-              <a:rPr sz="850" b="1" i="0">
-                <a:solidFill>
-                  <a:srgbClr val="FFFFFF"/>
-                </a:solidFill>
-                <a:latin typeface="Arial"/>
-              </a:rPr>
-              <a:t>2</a:t>
-            </a:r>
-          </a:p>
-        </p:txBody>
-      </p:sp>
-      <p:sp>
-        <p:nvSpPr>
-          <p:cNvPr id="41" name="TextBox 40"/>
-          <p:cNvSpPr txBox="1"/>
-          <p:nvPr/>
-        </p:nvSpPr>
-        <p:spPr>
-          <a:xfrm>
-            <a:off x="3291840" y="2578608"/>
-            <a:ext cx="1444752" cy="329184"/>
-          </a:xfrm>
-          <a:prstGeom prst="rect">
-            <a:avLst/>
-          </a:prstGeom>
-          <a:noFill/>
-        </p:spPr>
-        <p:txBody>
-          <a:bodyPr wrap="square" lIns="27432" rIns="27432">
-            <a:spAutoFit/>
-          </a:bodyPr>
-          <a:lstStyle/>
-          <a:p>
-            <a:pPr algn="l"/>
-            <a:r>
-              <a:rPr sz="950" b="1" i="0">
-                <a:solidFill>
-                  <a:srgbClr val="FFFFFF"/>
-                </a:solidFill>
-                <a:latin typeface="Arial"/>
-              </a:rPr>
-              <a:t>UNIFIED PDLC FOUNDATION</a:t>
-            </a:r>
-          </a:p>
-        </p:txBody>
-      </p:sp>
-      <p:sp>
-        <p:nvSpPr>
-          <p:cNvPr id="42" name="TextBox 41"/>
-          <p:cNvSpPr txBox="1"/>
-          <p:nvPr/>
-        </p:nvSpPr>
-        <p:spPr>
-          <a:xfrm>
-            <a:off x="2907792" y="3127248"/>
-            <a:ext cx="1810512" cy="1051560"/>
-          </a:xfrm>
-          <a:prstGeom prst="rect">
-            <a:avLst/>
-          </a:prstGeom>
-          <a:noFill/>
-        </p:spPr>
-        <p:txBody>
-          <a:bodyPr wrap="square" lIns="27432" rIns="27432">
-            <a:spAutoFit/>
-          </a:bodyPr>
-          <a:lstStyle/>
-          <a:p>
-            <a:pPr algn="l"/>
-            <a:r>
-              <a:rPr sz="740" b="0" i="0">
-                <a:solidFill>
-                  <a:srgbClr val="E8E8E8"/>
-                </a:solidFill>
-                <a:latin typeface="Arial"/>
-              </a:rPr>
-              <a:t>Requirements -&gt; code -&gt; tests
-Board and firmware knowledge graph
-Evidence lake for debug sessions
-PG1 / PG3 / PG5 lifecycle context</a:t>
-            </a:r>
-          </a:p>
-        </p:txBody>
-      </p:sp>
-      <p:sp>
-        <p:nvSpPr>
-          <p:cNvPr id="43" name="Rounded Rectangle 42"/>
-          <p:cNvSpPr/>
-          <p:nvPr/>
-        </p:nvSpPr>
-        <p:spPr>
-          <a:xfrm>
-            <a:off x="5047488" y="2432304"/>
-            <a:ext cx="2130552" cy="1993392"/>
-          </a:xfrm>
-          <a:prstGeom prst="roundRect">
-            <a:avLst/>
-          </a:prstGeom>
-          <a:solidFill>
-            <a:srgbClr val="333333"/>
-          </a:solidFill>
-          <a:ln w="15240">
-            <a:solidFill>
-              <a:srgbClr val="D71920"/>
-            </a:solidFill>
-          </a:ln>
-        </p:spPr>
-        <p:style>
-          <a:lnRef idx="1">
-            <a:schemeClr val="accent1"/>
-          </a:lnRef>
-          <a:fillRef idx="3">
-            <a:schemeClr val="accent1"/>
-          </a:fillRef>
-          <a:effectRef idx="2">
-            <a:schemeClr val="accent1"/>
-          </a:effectRef>
-          <a:fontRef idx="minor">
-            <a:schemeClr val="lt1"/>
-          </a:fontRef>
-        </p:style>
-        <p:txBody>
-          <a:bodyPr rtlCol="0" anchor="ctr"/>
-          <a:lstStyle/>
-          <a:p>
-            <a:pPr algn="ctr"/>
-          </a:p>
-        </p:txBody>
-      </p:sp>
-      <p:sp>
-        <p:nvSpPr>
-          <p:cNvPr id="44" name="Rectangle 43"/>
-          <p:cNvSpPr/>
-          <p:nvPr/>
-        </p:nvSpPr>
-        <p:spPr>
-          <a:xfrm>
-            <a:off x="5047488" y="2432304"/>
-            <a:ext cx="2130552" cy="54864"/>
+            <a:off x="256032" y="6400800"/>
+            <a:ext cx="11686032" cy="18288"/>
           </a:xfrm>
           <a:prstGeom prst="rect">
             <a:avLst/>
@@ -4765,57 +6033,14 @@
       </p:sp>
       <p:sp>
         <p:nvSpPr>
-          <p:cNvPr id="45" name="Rounded Rectangle 44"/>
-          <p:cNvSpPr/>
-          <p:nvPr/>
-        </p:nvSpPr>
-        <p:spPr>
-          <a:xfrm>
-            <a:off x="5166360" y="2596896"/>
-            <a:ext cx="347472" cy="347472"/>
-          </a:xfrm>
-          <a:prstGeom prst="roundRect">
-            <a:avLst/>
-          </a:prstGeom>
-          <a:solidFill>
-            <a:srgbClr val="D71920"/>
-          </a:solidFill>
-          <a:ln>
-            <a:noFill/>
-          </a:ln>
-        </p:spPr>
-        <p:style>
-          <a:lnRef idx="1">
-            <a:schemeClr val="accent1"/>
-          </a:lnRef>
-          <a:fillRef idx="3">
-            <a:schemeClr val="accent1"/>
-          </a:fillRef>
-          <a:effectRef idx="2">
-            <a:schemeClr val="accent1"/>
-          </a:effectRef>
-          <a:fontRef idx="minor">
-            <a:schemeClr val="lt1"/>
-          </a:fontRef>
-        </p:style>
-        <p:txBody>
-          <a:bodyPr rtlCol="0" anchor="ctr"/>
-          <a:lstStyle/>
-          <a:p>
-            <a:pPr algn="ctr"/>
-          </a:p>
-        </p:txBody>
-      </p:sp>
-      <p:sp>
-        <p:nvSpPr>
-          <p:cNvPr id="46" name="TextBox 45"/>
+          <p:cNvPr id="80" name="TextBox 79"/>
           <p:cNvSpPr txBox="1"/>
           <p:nvPr/>
         </p:nvSpPr>
         <p:spPr>
           <a:xfrm>
-            <a:off x="5166360" y="2660904"/>
-            <a:ext cx="347472" cy="91440"/>
+            <a:off x="310896" y="6547104"/>
+            <a:ext cx="3154680" cy="73152"/>
           </a:xfrm>
           <a:prstGeom prst="rect">
             <a:avLst/>
@@ -4823,1721 +6048,14 @@
           <a:noFill/>
         </p:spPr>
         <p:txBody>
-          <a:bodyPr wrap="square" lIns="27432" rIns="27432">
+          <a:bodyPr wrap="square" lIns="18288" rIns="18288">
             <a:spAutoFit/>
           </a:bodyPr>
           <a:lstStyle/>
           <a:p>
-            <a:pPr algn="ctr"/>
-            <a:r>
-              <a:rPr sz="850" b="1" i="0">
-                <a:solidFill>
-                  <a:srgbClr val="FFFFFF"/>
-                </a:solidFill>
-                <a:latin typeface="Arial"/>
-              </a:rPr>
-              <a:t>3</a:t>
-            </a:r>
-          </a:p>
-        </p:txBody>
-      </p:sp>
-      <p:sp>
-        <p:nvSpPr>
-          <p:cNvPr id="47" name="TextBox 46"/>
-          <p:cNvSpPr txBox="1"/>
-          <p:nvPr/>
-        </p:nvSpPr>
-        <p:spPr>
-          <a:xfrm>
-            <a:off x="5596128" y="2578608"/>
-            <a:ext cx="1444752" cy="329184"/>
-          </a:xfrm>
-          <a:prstGeom prst="rect">
-            <a:avLst/>
-          </a:prstGeom>
-          <a:noFill/>
-        </p:spPr>
-        <p:txBody>
-          <a:bodyPr wrap="square" lIns="27432" rIns="27432">
-            <a:spAutoFit/>
-          </a:bodyPr>
-          <a:lstStyle/>
-          <a:p>
             <a:pPr algn="l"/>
             <a:r>
-              <a:rPr sz="950" b="1" i="0">
-                <a:solidFill>
-                  <a:srgbClr val="FFFFFF"/>
-                </a:solidFill>
-                <a:latin typeface="Arial"/>
-              </a:rPr>
-              <a:t>AGENTIC ORCHESTRATION</a:t>
-            </a:r>
-          </a:p>
-        </p:txBody>
-      </p:sp>
-      <p:sp>
-        <p:nvSpPr>
-          <p:cNvPr id="48" name="TextBox 47"/>
-          <p:cNvSpPr txBox="1"/>
-          <p:nvPr/>
-        </p:nvSpPr>
-        <p:spPr>
-          <a:xfrm>
-            <a:off x="5212080" y="3127248"/>
-            <a:ext cx="1810512" cy="1051560"/>
-          </a:xfrm>
-          <a:prstGeom prst="rect">
-            <a:avLst/>
-          </a:prstGeom>
-          <a:noFill/>
-        </p:spPr>
-        <p:txBody>
-          <a:bodyPr wrap="square" lIns="27432" rIns="27432">
-            <a:spAutoFit/>
-          </a:bodyPr>
-          <a:lstStyle/>
-          <a:p>
-            <a:pPr algn="l"/>
-            <a:r>
-              <a:rPr sz="740" b="0" i="0">
-                <a:solidFill>
-                  <a:srgbClr val="E8E8E8"/>
-                </a:solidFill>
-                <a:latin typeface="Arial"/>
-              </a:rPr>
-              <a:t>Atlassian MCP routing
-Specialist JTAG RCA agents
-Copilot-assisted guarded fixes
-GitHub branch and PR automation</a:t>
-            </a:r>
-          </a:p>
-        </p:txBody>
-      </p:sp>
-      <p:sp>
-        <p:nvSpPr>
-          <p:cNvPr id="49" name="Rounded Rectangle 48"/>
-          <p:cNvSpPr/>
-          <p:nvPr/>
-        </p:nvSpPr>
-        <p:spPr>
-          <a:xfrm>
-            <a:off x="7351775" y="2432304"/>
-            <a:ext cx="2130552" cy="1993392"/>
-          </a:xfrm>
-          <a:prstGeom prst="roundRect">
-            <a:avLst/>
-          </a:prstGeom>
-          <a:solidFill>
-            <a:srgbClr val="333333"/>
-          </a:solidFill>
-          <a:ln w="15240">
-            <a:solidFill>
-              <a:srgbClr val="2E7D32"/>
-            </a:solidFill>
-          </a:ln>
-        </p:spPr>
-        <p:style>
-          <a:lnRef idx="1">
-            <a:schemeClr val="accent1"/>
-          </a:lnRef>
-          <a:fillRef idx="3">
-            <a:schemeClr val="accent1"/>
-          </a:fillRef>
-          <a:effectRef idx="2">
-            <a:schemeClr val="accent1"/>
-          </a:effectRef>
-          <a:fontRef idx="minor">
-            <a:schemeClr val="lt1"/>
-          </a:fontRef>
-        </p:style>
-        <p:txBody>
-          <a:bodyPr rtlCol="0" anchor="ctr"/>
-          <a:lstStyle/>
-          <a:p>
-            <a:pPr algn="ctr"/>
-          </a:p>
-        </p:txBody>
-      </p:sp>
-      <p:sp>
-        <p:nvSpPr>
-          <p:cNvPr id="50" name="Rectangle 49"/>
-          <p:cNvSpPr/>
-          <p:nvPr/>
-        </p:nvSpPr>
-        <p:spPr>
-          <a:xfrm>
-            <a:off x="7351775" y="2432304"/>
-            <a:ext cx="2130552" cy="54864"/>
-          </a:xfrm>
-          <a:prstGeom prst="rect">
-            <a:avLst/>
-          </a:prstGeom>
-          <a:solidFill>
-            <a:srgbClr val="2E7D32"/>
-          </a:solidFill>
-          <a:ln>
-            <a:noFill/>
-          </a:ln>
-        </p:spPr>
-        <p:style>
-          <a:lnRef idx="1">
-            <a:schemeClr val="accent1"/>
-          </a:lnRef>
-          <a:fillRef idx="3">
-            <a:schemeClr val="accent1"/>
-          </a:fillRef>
-          <a:effectRef idx="2">
-            <a:schemeClr val="accent1"/>
-          </a:effectRef>
-          <a:fontRef idx="minor">
-            <a:schemeClr val="lt1"/>
-          </a:fontRef>
-        </p:style>
-        <p:txBody>
-          <a:bodyPr rtlCol="0" anchor="ctr"/>
-          <a:lstStyle/>
-          <a:p>
-            <a:pPr algn="ctr"/>
-          </a:p>
-        </p:txBody>
-      </p:sp>
-      <p:sp>
-        <p:nvSpPr>
-          <p:cNvPr id="51" name="Rounded Rectangle 50"/>
-          <p:cNvSpPr/>
-          <p:nvPr/>
-        </p:nvSpPr>
-        <p:spPr>
-          <a:xfrm>
-            <a:off x="7470647" y="2596896"/>
-            <a:ext cx="347472" cy="347472"/>
-          </a:xfrm>
-          <a:prstGeom prst="roundRect">
-            <a:avLst/>
-          </a:prstGeom>
-          <a:solidFill>
-            <a:srgbClr val="2E7D32"/>
-          </a:solidFill>
-          <a:ln>
-            <a:noFill/>
-          </a:ln>
-        </p:spPr>
-        <p:style>
-          <a:lnRef idx="1">
-            <a:schemeClr val="accent1"/>
-          </a:lnRef>
-          <a:fillRef idx="3">
-            <a:schemeClr val="accent1"/>
-          </a:fillRef>
-          <a:effectRef idx="2">
-            <a:schemeClr val="accent1"/>
-          </a:effectRef>
-          <a:fontRef idx="minor">
-            <a:schemeClr val="lt1"/>
-          </a:fontRef>
-        </p:style>
-        <p:txBody>
-          <a:bodyPr rtlCol="0" anchor="ctr"/>
-          <a:lstStyle/>
-          <a:p>
-            <a:pPr algn="ctr"/>
-          </a:p>
-        </p:txBody>
-      </p:sp>
-      <p:sp>
-        <p:nvSpPr>
-          <p:cNvPr id="52" name="TextBox 51"/>
-          <p:cNvSpPr txBox="1"/>
-          <p:nvPr/>
-        </p:nvSpPr>
-        <p:spPr>
-          <a:xfrm>
-            <a:off x="7470647" y="2660904"/>
-            <a:ext cx="347472" cy="91440"/>
-          </a:xfrm>
-          <a:prstGeom prst="rect">
-            <a:avLst/>
-          </a:prstGeom>
-          <a:noFill/>
-        </p:spPr>
-        <p:txBody>
-          <a:bodyPr wrap="square" lIns="27432" rIns="27432">
-            <a:spAutoFit/>
-          </a:bodyPr>
-          <a:lstStyle/>
-          <a:p>
-            <a:pPr algn="ctr"/>
-            <a:r>
-              <a:rPr sz="850" b="1" i="0">
-                <a:solidFill>
-                  <a:srgbClr val="FFFFFF"/>
-                </a:solidFill>
-                <a:latin typeface="Arial"/>
-              </a:rPr>
-              <a:t>4</a:t>
-            </a:r>
-          </a:p>
-        </p:txBody>
-      </p:sp>
-      <p:sp>
-        <p:nvSpPr>
-          <p:cNvPr id="53" name="TextBox 52"/>
-          <p:cNvSpPr txBox="1"/>
-          <p:nvPr/>
-        </p:nvSpPr>
-        <p:spPr>
-          <a:xfrm>
-            <a:off x="7900415" y="2578608"/>
-            <a:ext cx="1444752" cy="329184"/>
-          </a:xfrm>
-          <a:prstGeom prst="rect">
-            <a:avLst/>
-          </a:prstGeom>
-          <a:noFill/>
-        </p:spPr>
-        <p:txBody>
-          <a:bodyPr wrap="square" lIns="27432" rIns="27432">
-            <a:spAutoFit/>
-          </a:bodyPr>
-          <a:lstStyle/>
-          <a:p>
-            <a:pPr algn="l"/>
-            <a:r>
-              <a:rPr sz="950" b="1" i="0">
-                <a:solidFill>
-                  <a:srgbClr val="FFFFFF"/>
-                </a:solidFill>
-                <a:latin typeface="Arial"/>
-              </a:rPr>
-              <a:t>NPI GATE OUTCOMES</a:t>
-            </a:r>
-          </a:p>
-        </p:txBody>
-      </p:sp>
-      <p:sp>
-        <p:nvSpPr>
-          <p:cNvPr id="54" name="TextBox 53"/>
-          <p:cNvSpPr txBox="1"/>
-          <p:nvPr/>
-        </p:nvSpPr>
-        <p:spPr>
-          <a:xfrm>
-            <a:off x="7516367" y="3127248"/>
-            <a:ext cx="1810512" cy="1051560"/>
-          </a:xfrm>
-          <a:prstGeom prst="rect">
-            <a:avLst/>
-          </a:prstGeom>
-          <a:noFill/>
-        </p:spPr>
-        <p:txBody>
-          <a:bodyPr wrap="square" lIns="27432" rIns="27432">
-            <a:spAutoFit/>
-          </a:bodyPr>
-          <a:lstStyle/>
-          <a:p>
-            <a:pPr algn="l"/>
-            <a:r>
-              <a:rPr sz="740" b="0" i="0">
-                <a:solidFill>
-                  <a:srgbClr val="E8E8E8"/>
-                </a:solidFill>
-                <a:latin typeface="Arial"/>
-              </a:rPr>
-              <a:t>PG1 risk-backed scope
-PG3 root cause and fix proof
-PG5 READY / NOT_READY verdict
-Reusable audit evidence package</a:t>
-            </a:r>
-          </a:p>
-        </p:txBody>
-      </p:sp>
-      <p:sp>
-        <p:nvSpPr>
-          <p:cNvPr id="55" name="Rounded Rectangle 54"/>
-          <p:cNvSpPr/>
-          <p:nvPr/>
-        </p:nvSpPr>
-        <p:spPr>
-          <a:xfrm>
-            <a:off x="9729216" y="1901952"/>
-            <a:ext cx="1993392" cy="3063240"/>
-          </a:xfrm>
-          <a:prstGeom prst="roundRect">
-            <a:avLst/>
-          </a:prstGeom>
-          <a:solidFill>
-            <a:srgbClr val="111111"/>
-          </a:solidFill>
-          <a:ln w="15240">
-            <a:solidFill>
-              <a:srgbClr val="D71920"/>
-            </a:solidFill>
-          </a:ln>
-        </p:spPr>
-        <p:style>
-          <a:lnRef idx="1">
-            <a:schemeClr val="accent1"/>
-          </a:lnRef>
-          <a:fillRef idx="3">
-            <a:schemeClr val="accent1"/>
-          </a:fillRef>
-          <a:effectRef idx="2">
-            <a:schemeClr val="accent1"/>
-          </a:effectRef>
-          <a:fontRef idx="minor">
-            <a:schemeClr val="lt1"/>
-          </a:fontRef>
-        </p:style>
-        <p:txBody>
-          <a:bodyPr rtlCol="0" anchor="ctr"/>
-          <a:lstStyle/>
-          <a:p>
-            <a:pPr algn="ctr"/>
-          </a:p>
-        </p:txBody>
-      </p:sp>
-      <p:sp>
-        <p:nvSpPr>
-          <p:cNvPr id="56" name="TextBox 55"/>
-          <p:cNvSpPr txBox="1"/>
-          <p:nvPr/>
-        </p:nvSpPr>
-        <p:spPr>
-          <a:xfrm>
-            <a:off x="9893808" y="2057400"/>
-            <a:ext cx="1627632" cy="164592"/>
-          </a:xfrm>
-          <a:prstGeom prst="rect">
-            <a:avLst/>
-          </a:prstGeom>
-          <a:noFill/>
-        </p:spPr>
-        <p:txBody>
-          <a:bodyPr wrap="square" lIns="27432" rIns="27432">
-            <a:spAutoFit/>
-          </a:bodyPr>
-          <a:lstStyle/>
-          <a:p>
-            <a:pPr algn="ctr"/>
-            <a:r>
-              <a:rPr sz="1100" b="1" i="0">
-                <a:solidFill>
-                  <a:srgbClr val="FFFFFF"/>
-                </a:solidFill>
-                <a:latin typeface="Arial"/>
-              </a:rPr>
-              <a:t>BUSINESS VALUE</a:t>
-            </a:r>
-          </a:p>
-        </p:txBody>
-      </p:sp>
-      <p:sp>
-        <p:nvSpPr>
-          <p:cNvPr id="57" name="TextBox 56"/>
-          <p:cNvSpPr txBox="1"/>
-          <p:nvPr/>
-        </p:nvSpPr>
-        <p:spPr>
-          <a:xfrm>
-            <a:off x="9875520" y="2295144"/>
-            <a:ext cx="1673352" cy="109728"/>
-          </a:xfrm>
-          <a:prstGeom prst="rect">
-            <a:avLst/>
-          </a:prstGeom>
-          <a:noFill/>
-        </p:spPr>
-        <p:txBody>
-          <a:bodyPr wrap="square" lIns="27432" rIns="27432">
-            <a:spAutoFit/>
-          </a:bodyPr>
-          <a:lstStyle/>
-          <a:p>
-            <a:pPr algn="ctr"/>
-            <a:r>
-              <a:rPr sz="640" b="0" i="0">
-                <a:solidFill>
-                  <a:srgbClr val="B8B8B8"/>
-                </a:solidFill>
-                <a:latin typeface="Arial"/>
-              </a:rPr>
-              <a:t>Measured for the V8 demo story</a:t>
-            </a:r>
-          </a:p>
-        </p:txBody>
-      </p:sp>
-      <p:sp>
-        <p:nvSpPr>
-          <p:cNvPr id="58" name="Rounded Rectangle 57"/>
-          <p:cNvSpPr/>
-          <p:nvPr/>
-        </p:nvSpPr>
-        <p:spPr>
-          <a:xfrm>
-            <a:off x="9893808" y="2542032"/>
-            <a:ext cx="1234440" cy="713232"/>
-          </a:xfrm>
-          <a:prstGeom prst="roundRect">
-            <a:avLst/>
-          </a:prstGeom>
-          <a:solidFill>
-            <a:srgbClr val="333333"/>
-          </a:solidFill>
-          <a:ln w="15240">
-            <a:solidFill>
-              <a:srgbClr val="D71920"/>
-            </a:solidFill>
-          </a:ln>
-        </p:spPr>
-        <p:style>
-          <a:lnRef idx="1">
-            <a:schemeClr val="accent1"/>
-          </a:lnRef>
-          <a:fillRef idx="3">
-            <a:schemeClr val="accent1"/>
-          </a:fillRef>
-          <a:effectRef idx="2">
-            <a:schemeClr val="accent1"/>
-          </a:effectRef>
-          <a:fontRef idx="minor">
-            <a:schemeClr val="lt1"/>
-          </a:fontRef>
-        </p:style>
-        <p:txBody>
-          <a:bodyPr rtlCol="0" anchor="ctr"/>
-          <a:lstStyle/>
-          <a:p>
-            <a:pPr algn="ctr"/>
-          </a:p>
-        </p:txBody>
-      </p:sp>
-      <p:sp>
-        <p:nvSpPr>
-          <p:cNvPr id="59" name="TextBox 58"/>
-          <p:cNvSpPr txBox="1"/>
-          <p:nvPr/>
-        </p:nvSpPr>
-        <p:spPr>
-          <a:xfrm>
-            <a:off x="9966960" y="2606040"/>
-            <a:ext cx="1088136" cy="201168"/>
-          </a:xfrm>
-          <a:prstGeom prst="rect">
-            <a:avLst/>
-          </a:prstGeom>
-          <a:noFill/>
-        </p:spPr>
-        <p:txBody>
-          <a:bodyPr wrap="square" lIns="27432" rIns="27432">
-            <a:spAutoFit/>
-          </a:bodyPr>
-          <a:lstStyle/>
-          <a:p>
-            <a:pPr algn="ctr"/>
-            <a:r>
-              <a:rPr sz="1600" b="1" i="0">
-                <a:solidFill>
-                  <a:srgbClr val="D71920"/>
-                </a:solidFill>
-                <a:latin typeface="Arial"/>
-              </a:rPr>
-              <a:t>41%</a:t>
-            </a:r>
-          </a:p>
-        </p:txBody>
-      </p:sp>
-      <p:sp>
-        <p:nvSpPr>
-          <p:cNvPr id="60" name="TextBox 59"/>
-          <p:cNvSpPr txBox="1"/>
-          <p:nvPr/>
-        </p:nvSpPr>
-        <p:spPr>
-          <a:xfrm>
-            <a:off x="9966960" y="2880360"/>
-            <a:ext cx="1088136" cy="228600"/>
-          </a:xfrm>
-          <a:prstGeom prst="rect">
-            <a:avLst/>
-          </a:prstGeom>
-          <a:noFill/>
-        </p:spPr>
-        <p:txBody>
-          <a:bodyPr wrap="square" lIns="27432" rIns="27432">
-            <a:spAutoFit/>
-          </a:bodyPr>
-          <a:lstStyle/>
-          <a:p>
-            <a:pPr algn="ctr"/>
-            <a:r>
-              <a:rPr sz="680" b="0" i="0">
-                <a:solidFill>
-                  <a:srgbClr val="E8E8E8"/>
-                </a:solidFill>
-                <a:latin typeface="Arial"/>
-              </a:rPr>
-              <a:t>PDLC lead-time drop</a:t>
-            </a:r>
-          </a:p>
-        </p:txBody>
-      </p:sp>
-      <p:sp>
-        <p:nvSpPr>
-          <p:cNvPr id="61" name="Rounded Rectangle 60"/>
-          <p:cNvSpPr/>
-          <p:nvPr/>
-        </p:nvSpPr>
-        <p:spPr>
-          <a:xfrm>
-            <a:off x="9893808" y="3401568"/>
-            <a:ext cx="1234440" cy="713232"/>
-          </a:xfrm>
-          <a:prstGeom prst="roundRect">
-            <a:avLst/>
-          </a:prstGeom>
-          <a:solidFill>
-            <a:srgbClr val="333333"/>
-          </a:solidFill>
-          <a:ln w="15240">
-            <a:solidFill>
-              <a:srgbClr val="2E7D32"/>
-            </a:solidFill>
-          </a:ln>
-        </p:spPr>
-        <p:style>
-          <a:lnRef idx="1">
-            <a:schemeClr val="accent1"/>
-          </a:lnRef>
-          <a:fillRef idx="3">
-            <a:schemeClr val="accent1"/>
-          </a:fillRef>
-          <a:effectRef idx="2">
-            <a:schemeClr val="accent1"/>
-          </a:effectRef>
-          <a:fontRef idx="minor">
-            <a:schemeClr val="lt1"/>
-          </a:fontRef>
-        </p:style>
-        <p:txBody>
-          <a:bodyPr rtlCol="0" anchor="ctr"/>
-          <a:lstStyle/>
-          <a:p>
-            <a:pPr algn="ctr"/>
-          </a:p>
-        </p:txBody>
-      </p:sp>
-      <p:sp>
-        <p:nvSpPr>
-          <p:cNvPr id="62" name="TextBox 61"/>
-          <p:cNvSpPr txBox="1"/>
-          <p:nvPr/>
-        </p:nvSpPr>
-        <p:spPr>
-          <a:xfrm>
-            <a:off x="9966960" y="3465576"/>
-            <a:ext cx="1088136" cy="201168"/>
-          </a:xfrm>
-          <a:prstGeom prst="rect">
-            <a:avLst/>
-          </a:prstGeom>
-          <a:noFill/>
-        </p:spPr>
-        <p:txBody>
-          <a:bodyPr wrap="square" lIns="27432" rIns="27432">
-            <a:spAutoFit/>
-          </a:bodyPr>
-          <a:lstStyle/>
-          <a:p>
-            <a:pPr algn="ctr"/>
-            <a:r>
-              <a:rPr sz="1600" b="1" i="0">
-                <a:solidFill>
-                  <a:srgbClr val="2E7D32"/>
-                </a:solidFill>
-                <a:latin typeface="Arial"/>
-              </a:rPr>
-              <a:t>60%</a:t>
-            </a:r>
-          </a:p>
-        </p:txBody>
-      </p:sp>
-      <p:sp>
-        <p:nvSpPr>
-          <p:cNvPr id="63" name="TextBox 62"/>
-          <p:cNvSpPr txBox="1"/>
-          <p:nvPr/>
-        </p:nvSpPr>
-        <p:spPr>
-          <a:xfrm>
-            <a:off x="9966960" y="3739896"/>
-            <a:ext cx="1088136" cy="228600"/>
-          </a:xfrm>
-          <a:prstGeom prst="rect">
-            <a:avLst/>
-          </a:prstGeom>
-          <a:noFill/>
-        </p:spPr>
-        <p:txBody>
-          <a:bodyPr wrap="square" lIns="27432" rIns="27432">
-            <a:spAutoFit/>
-          </a:bodyPr>
-          <a:lstStyle/>
-          <a:p>
-            <a:pPr algn="ctr"/>
-            <a:r>
-              <a:rPr sz="680" b="0" i="0">
-                <a:solidFill>
-                  <a:srgbClr val="E8E8E8"/>
-                </a:solidFill>
-                <a:latin typeface="Arial"/>
-              </a:rPr>
-              <a:t>fewer defect escapes</a:t>
-            </a:r>
-          </a:p>
-        </p:txBody>
-      </p:sp>
-      <p:sp>
-        <p:nvSpPr>
-          <p:cNvPr id="64" name="Rounded Rectangle 63"/>
-          <p:cNvSpPr/>
-          <p:nvPr/>
-        </p:nvSpPr>
-        <p:spPr>
-          <a:xfrm>
-            <a:off x="9893808" y="4261104"/>
-            <a:ext cx="1234440" cy="713232"/>
-          </a:xfrm>
-          <a:prstGeom prst="roundRect">
-            <a:avLst/>
-          </a:prstGeom>
-          <a:solidFill>
-            <a:srgbClr val="333333"/>
-          </a:solidFill>
-          <a:ln w="15240">
-            <a:solidFill>
-              <a:srgbClr val="D71920"/>
-            </a:solidFill>
-          </a:ln>
-        </p:spPr>
-        <p:style>
-          <a:lnRef idx="1">
-            <a:schemeClr val="accent1"/>
-          </a:lnRef>
-          <a:fillRef idx="3">
-            <a:schemeClr val="accent1"/>
-          </a:fillRef>
-          <a:effectRef idx="2">
-            <a:schemeClr val="accent1"/>
-          </a:effectRef>
-          <a:fontRef idx="minor">
-            <a:schemeClr val="lt1"/>
-          </a:fontRef>
-        </p:style>
-        <p:txBody>
-          <a:bodyPr rtlCol="0" anchor="ctr"/>
-          <a:lstStyle/>
-          <a:p>
-            <a:pPr algn="ctr"/>
-          </a:p>
-        </p:txBody>
-      </p:sp>
-      <p:sp>
-        <p:nvSpPr>
-          <p:cNvPr id="65" name="TextBox 64"/>
-          <p:cNvSpPr txBox="1"/>
-          <p:nvPr/>
-        </p:nvSpPr>
-        <p:spPr>
-          <a:xfrm>
-            <a:off x="9966960" y="4325112"/>
-            <a:ext cx="1088136" cy="201168"/>
-          </a:xfrm>
-          <a:prstGeom prst="rect">
-            <a:avLst/>
-          </a:prstGeom>
-          <a:noFill/>
-        </p:spPr>
-        <p:txBody>
-          <a:bodyPr wrap="square" lIns="27432" rIns="27432">
-            <a:spAutoFit/>
-          </a:bodyPr>
-          <a:lstStyle/>
-          <a:p>
-            <a:pPr algn="ctr"/>
-            <a:r>
-              <a:rPr sz="1600" b="1" i="0">
-                <a:solidFill>
-                  <a:srgbClr val="D71920"/>
-                </a:solidFill>
-                <a:latin typeface="Arial"/>
-              </a:rPr>
-              <a:t>92%</a:t>
-            </a:r>
-          </a:p>
-        </p:txBody>
-      </p:sp>
-      <p:sp>
-        <p:nvSpPr>
-          <p:cNvPr id="66" name="TextBox 65"/>
-          <p:cNvSpPr txBox="1"/>
-          <p:nvPr/>
-        </p:nvSpPr>
-        <p:spPr>
-          <a:xfrm>
-            <a:off x="9966960" y="4599432"/>
-            <a:ext cx="1088136" cy="228600"/>
-          </a:xfrm>
-          <a:prstGeom prst="rect">
-            <a:avLst/>
-          </a:prstGeom>
-          <a:noFill/>
-        </p:spPr>
-        <p:txBody>
-          <a:bodyPr wrap="square" lIns="27432" rIns="27432">
-            <a:spAutoFit/>
-          </a:bodyPr>
-          <a:lstStyle/>
-          <a:p>
-            <a:pPr algn="ctr"/>
-            <a:r>
-              <a:rPr sz="680" b="0" i="0">
-                <a:solidFill>
-                  <a:srgbClr val="E8E8E8"/>
-                </a:solidFill>
-                <a:latin typeface="Arial"/>
-              </a:rPr>
-              <a:t>agent handoff success</a:t>
-            </a:r>
-          </a:p>
-        </p:txBody>
-      </p:sp>
-      <p:sp>
-        <p:nvSpPr>
-          <p:cNvPr id="67" name="Rounded Rectangle 66"/>
-          <p:cNvSpPr/>
-          <p:nvPr/>
-        </p:nvSpPr>
-        <p:spPr>
-          <a:xfrm>
-            <a:off x="256032" y="5468112"/>
-            <a:ext cx="6903720" cy="749808"/>
-          </a:xfrm>
-          <a:prstGeom prst="roundRect">
-            <a:avLst/>
-          </a:prstGeom>
-          <a:solidFill>
-            <a:srgbClr val="2B2B2B"/>
-          </a:solidFill>
-          <a:ln w="15240">
-            <a:solidFill>
-              <a:srgbClr val="D71920"/>
-            </a:solidFill>
-          </a:ln>
-        </p:spPr>
-        <p:style>
-          <a:lnRef idx="1">
-            <a:schemeClr val="accent1"/>
-          </a:lnRef>
-          <a:fillRef idx="3">
-            <a:schemeClr val="accent1"/>
-          </a:fillRef>
-          <a:effectRef idx="2">
-            <a:schemeClr val="accent1"/>
-          </a:effectRef>
-          <a:fontRef idx="minor">
-            <a:schemeClr val="lt1"/>
-          </a:fontRef>
-        </p:style>
-        <p:txBody>
-          <a:bodyPr rtlCol="0" anchor="ctr"/>
-          <a:lstStyle/>
-          <a:p>
-            <a:pPr algn="ctr"/>
-          </a:p>
-        </p:txBody>
-      </p:sp>
-      <p:sp>
-        <p:nvSpPr>
-          <p:cNvPr id="68" name="TextBox 67"/>
-          <p:cNvSpPr txBox="1"/>
-          <p:nvPr/>
-        </p:nvSpPr>
-        <p:spPr>
-          <a:xfrm>
-            <a:off x="457200" y="5577840"/>
-            <a:ext cx="1325880" cy="118872"/>
-          </a:xfrm>
-          <a:prstGeom prst="rect">
-            <a:avLst/>
-          </a:prstGeom>
-          <a:noFill/>
-        </p:spPr>
-        <p:txBody>
-          <a:bodyPr wrap="square" lIns="27432" rIns="27432">
-            <a:spAutoFit/>
-          </a:bodyPr>
-          <a:lstStyle/>
-          <a:p>
-            <a:pPr algn="l"/>
-            <a:r>
-              <a:rPr sz="850" b="1" i="0">
-                <a:solidFill>
-                  <a:srgbClr val="D71920"/>
-                </a:solidFill>
-                <a:latin typeface="Arial"/>
-              </a:rPr>
-              <a:t>LIVE DEMO FLOW</a:t>
-            </a:r>
-          </a:p>
-        </p:txBody>
-      </p:sp>
-      <p:sp>
-        <p:nvSpPr>
-          <p:cNvPr id="69" name="Rounded Rectangle 68"/>
-          <p:cNvSpPr/>
-          <p:nvPr/>
-        </p:nvSpPr>
-        <p:spPr>
-          <a:xfrm>
-            <a:off x="1874519" y="5650992"/>
-            <a:ext cx="566928" cy="256032"/>
-          </a:xfrm>
-          <a:prstGeom prst="roundRect">
-            <a:avLst/>
-          </a:prstGeom>
-          <a:solidFill>
-            <a:srgbClr val="D71920"/>
-          </a:solidFill>
-          <a:ln>
-            <a:noFill/>
-          </a:ln>
-        </p:spPr>
-        <p:style>
-          <a:lnRef idx="1">
-            <a:schemeClr val="accent1"/>
-          </a:lnRef>
-          <a:fillRef idx="3">
-            <a:schemeClr val="accent1"/>
-          </a:fillRef>
-          <a:effectRef idx="2">
-            <a:schemeClr val="accent1"/>
-          </a:effectRef>
-          <a:fontRef idx="minor">
-            <a:schemeClr val="lt1"/>
-          </a:fontRef>
-        </p:style>
-        <p:txBody>
-          <a:bodyPr rtlCol="0" anchor="ctr"/>
-          <a:lstStyle/>
-          <a:p>
-            <a:pPr algn="ctr"/>
-          </a:p>
-        </p:txBody>
-      </p:sp>
-      <p:sp>
-        <p:nvSpPr>
-          <p:cNvPr id="70" name="TextBox 69"/>
-          <p:cNvSpPr txBox="1"/>
-          <p:nvPr/>
-        </p:nvSpPr>
-        <p:spPr>
-          <a:xfrm>
-            <a:off x="1874519" y="5701284"/>
-            <a:ext cx="566928" cy="73152"/>
-          </a:xfrm>
-          <a:prstGeom prst="rect">
-            <a:avLst/>
-          </a:prstGeom>
-          <a:noFill/>
-        </p:spPr>
-        <p:txBody>
-          <a:bodyPr wrap="square" lIns="27432" rIns="27432">
-            <a:spAutoFit/>
-          </a:bodyPr>
-          <a:lstStyle/>
-          <a:p>
-            <a:pPr algn="ctr"/>
-            <a:r>
-              <a:rPr sz="650" b="1" i="0">
-                <a:solidFill>
-                  <a:srgbClr val="FFFFFF"/>
-                </a:solidFill>
-                <a:latin typeface="Arial"/>
-              </a:rPr>
-              <a:t>PG1</a:t>
-            </a:r>
-          </a:p>
-        </p:txBody>
-      </p:sp>
-      <p:sp>
-        <p:nvSpPr>
-          <p:cNvPr id="71" name="TextBox 70"/>
-          <p:cNvSpPr txBox="1"/>
-          <p:nvPr/>
-        </p:nvSpPr>
-        <p:spPr>
-          <a:xfrm>
-            <a:off x="1737359" y="5961888"/>
-            <a:ext cx="841248" cy="73152"/>
-          </a:xfrm>
-          <a:prstGeom prst="rect">
-            <a:avLst/>
-          </a:prstGeom>
-          <a:noFill/>
-        </p:spPr>
-        <p:txBody>
-          <a:bodyPr wrap="square" lIns="27432" rIns="27432">
-            <a:spAutoFit/>
-          </a:bodyPr>
-          <a:lstStyle/>
-          <a:p>
-            <a:pPr algn="ctr"/>
-            <a:r>
-              <a:rPr sz="570" b="0" i="0">
-                <a:solidFill>
-                  <a:srgbClr val="E8E8E8"/>
-                </a:solidFill>
-                <a:latin typeface="Arial"/>
-              </a:rPr>
-              <a:t>Discovery</a:t>
-            </a:r>
-          </a:p>
-        </p:txBody>
-      </p:sp>
-      <p:sp>
-        <p:nvSpPr>
-          <p:cNvPr id="72" name="TextBox 71"/>
-          <p:cNvSpPr txBox="1"/>
-          <p:nvPr/>
-        </p:nvSpPr>
-        <p:spPr>
-          <a:xfrm>
-            <a:off x="2532887" y="5678424"/>
-            <a:ext cx="182880" cy="73152"/>
-          </a:xfrm>
-          <a:prstGeom prst="rect">
-            <a:avLst/>
-          </a:prstGeom>
-          <a:noFill/>
-        </p:spPr>
-        <p:txBody>
-          <a:bodyPr wrap="square" lIns="27432" rIns="27432">
-            <a:spAutoFit/>
-          </a:bodyPr>
-          <a:lstStyle/>
-          <a:p>
-            <a:pPr algn="ctr"/>
-            <a:r>
-              <a:rPr sz="1000" b="1" i="0">
-                <a:solidFill>
-                  <a:srgbClr val="D71920"/>
-                </a:solidFill>
-                <a:latin typeface="Arial"/>
-              </a:rPr>
-              <a:t>&gt;</a:t>
-            </a:r>
-          </a:p>
-        </p:txBody>
-      </p:sp>
-      <p:sp>
-        <p:nvSpPr>
-          <p:cNvPr id="73" name="Rounded Rectangle 72"/>
-          <p:cNvSpPr/>
-          <p:nvPr/>
-        </p:nvSpPr>
-        <p:spPr>
-          <a:xfrm>
-            <a:off x="2862072" y="5650992"/>
-            <a:ext cx="566928" cy="256032"/>
-          </a:xfrm>
-          <a:prstGeom prst="roundRect">
-            <a:avLst/>
-          </a:prstGeom>
-          <a:solidFill>
-            <a:srgbClr val="2E7D32"/>
-          </a:solidFill>
-          <a:ln>
-            <a:noFill/>
-          </a:ln>
-        </p:spPr>
-        <p:style>
-          <a:lnRef idx="1">
-            <a:schemeClr val="accent1"/>
-          </a:lnRef>
-          <a:fillRef idx="3">
-            <a:schemeClr val="accent1"/>
-          </a:fillRef>
-          <a:effectRef idx="2">
-            <a:schemeClr val="accent1"/>
-          </a:effectRef>
-          <a:fontRef idx="minor">
-            <a:schemeClr val="lt1"/>
-          </a:fontRef>
-        </p:style>
-        <p:txBody>
-          <a:bodyPr rtlCol="0" anchor="ctr"/>
-          <a:lstStyle/>
-          <a:p>
-            <a:pPr algn="ctr"/>
-          </a:p>
-        </p:txBody>
-      </p:sp>
-      <p:sp>
-        <p:nvSpPr>
-          <p:cNvPr id="74" name="TextBox 73"/>
-          <p:cNvSpPr txBox="1"/>
-          <p:nvPr/>
-        </p:nvSpPr>
-        <p:spPr>
-          <a:xfrm>
-            <a:off x="2862072" y="5701284"/>
-            <a:ext cx="566928" cy="73152"/>
-          </a:xfrm>
-          <a:prstGeom prst="rect">
-            <a:avLst/>
-          </a:prstGeom>
-          <a:noFill/>
-        </p:spPr>
-        <p:txBody>
-          <a:bodyPr wrap="square" lIns="27432" rIns="27432">
-            <a:spAutoFit/>
-          </a:bodyPr>
-          <a:lstStyle/>
-          <a:p>
-            <a:pPr algn="ctr"/>
-            <a:r>
-              <a:rPr sz="650" b="1" i="0">
-                <a:solidFill>
-                  <a:srgbClr val="FFFFFF"/>
-                </a:solidFill>
-                <a:latin typeface="Arial"/>
-              </a:rPr>
-              <a:t>PG3</a:t>
-            </a:r>
-          </a:p>
-        </p:txBody>
-      </p:sp>
-      <p:sp>
-        <p:nvSpPr>
-          <p:cNvPr id="75" name="TextBox 74"/>
-          <p:cNvSpPr txBox="1"/>
-          <p:nvPr/>
-        </p:nvSpPr>
-        <p:spPr>
-          <a:xfrm>
-            <a:off x="2724912" y="5961888"/>
-            <a:ext cx="841248" cy="73152"/>
-          </a:xfrm>
-          <a:prstGeom prst="rect">
-            <a:avLst/>
-          </a:prstGeom>
-          <a:noFill/>
-        </p:spPr>
-        <p:txBody>
-          <a:bodyPr wrap="square" lIns="27432" rIns="27432">
-            <a:spAutoFit/>
-          </a:bodyPr>
-          <a:lstStyle/>
-          <a:p>
-            <a:pPr algn="ctr"/>
-            <a:r>
-              <a:rPr sz="570" b="0" i="0">
-                <a:solidFill>
-                  <a:srgbClr val="E8E8E8"/>
-                </a:solidFill>
-                <a:latin typeface="Arial"/>
-              </a:rPr>
-              <a:t>JTAG RCA</a:t>
-            </a:r>
-          </a:p>
-        </p:txBody>
-      </p:sp>
-      <p:sp>
-        <p:nvSpPr>
-          <p:cNvPr id="76" name="TextBox 75"/>
-          <p:cNvSpPr txBox="1"/>
-          <p:nvPr/>
-        </p:nvSpPr>
-        <p:spPr>
-          <a:xfrm>
-            <a:off x="3520440" y="5678424"/>
-            <a:ext cx="182880" cy="73152"/>
-          </a:xfrm>
-          <a:prstGeom prst="rect">
-            <a:avLst/>
-          </a:prstGeom>
-          <a:noFill/>
-        </p:spPr>
-        <p:txBody>
-          <a:bodyPr wrap="square" lIns="27432" rIns="27432">
-            <a:spAutoFit/>
-          </a:bodyPr>
-          <a:lstStyle/>
-          <a:p>
-            <a:pPr algn="ctr"/>
-            <a:r>
-              <a:rPr sz="1000" b="1" i="0">
-                <a:solidFill>
-                  <a:srgbClr val="D71920"/>
-                </a:solidFill>
-                <a:latin typeface="Arial"/>
-              </a:rPr>
-              <a:t>&gt;</a:t>
-            </a:r>
-          </a:p>
-        </p:txBody>
-      </p:sp>
-      <p:sp>
-        <p:nvSpPr>
-          <p:cNvPr id="77" name="Rounded Rectangle 76"/>
-          <p:cNvSpPr/>
-          <p:nvPr/>
-        </p:nvSpPr>
-        <p:spPr>
-          <a:xfrm>
-            <a:off x="3849624" y="5650992"/>
-            <a:ext cx="566928" cy="256032"/>
-          </a:xfrm>
-          <a:prstGeom prst="roundRect">
-            <a:avLst/>
-          </a:prstGeom>
-          <a:solidFill>
-            <a:srgbClr val="D71920"/>
-          </a:solidFill>
-          <a:ln>
-            <a:noFill/>
-          </a:ln>
-        </p:spPr>
-        <p:style>
-          <a:lnRef idx="1">
-            <a:schemeClr val="accent1"/>
-          </a:lnRef>
-          <a:fillRef idx="3">
-            <a:schemeClr val="accent1"/>
-          </a:fillRef>
-          <a:effectRef idx="2">
-            <a:schemeClr val="accent1"/>
-          </a:effectRef>
-          <a:fontRef idx="minor">
-            <a:schemeClr val="lt1"/>
-          </a:fontRef>
-        </p:style>
-        <p:txBody>
-          <a:bodyPr rtlCol="0" anchor="ctr"/>
-          <a:lstStyle/>
-          <a:p>
-            <a:pPr algn="ctr"/>
-          </a:p>
-        </p:txBody>
-      </p:sp>
-      <p:sp>
-        <p:nvSpPr>
-          <p:cNvPr id="78" name="TextBox 77"/>
-          <p:cNvSpPr txBox="1"/>
-          <p:nvPr/>
-        </p:nvSpPr>
-        <p:spPr>
-          <a:xfrm>
-            <a:off x="3849624" y="5701284"/>
-            <a:ext cx="566928" cy="73152"/>
-          </a:xfrm>
-          <a:prstGeom prst="rect">
-            <a:avLst/>
-          </a:prstGeom>
-          <a:noFill/>
-        </p:spPr>
-        <p:txBody>
-          <a:bodyPr wrap="square" lIns="27432" rIns="27432">
-            <a:spAutoFit/>
-          </a:bodyPr>
-          <a:lstStyle/>
-          <a:p>
-            <a:pPr algn="ctr"/>
-            <a:r>
-              <a:rPr sz="650" b="1" i="0">
-                <a:solidFill>
-                  <a:srgbClr val="FFFFFF"/>
-                </a:solidFill>
-                <a:latin typeface="Arial"/>
-              </a:rPr>
-              <a:t>FIX</a:t>
-            </a:r>
-          </a:p>
-        </p:txBody>
-      </p:sp>
-      <p:sp>
-        <p:nvSpPr>
-          <p:cNvPr id="79" name="TextBox 78"/>
-          <p:cNvSpPr txBox="1"/>
-          <p:nvPr/>
-        </p:nvSpPr>
-        <p:spPr>
-          <a:xfrm>
-            <a:off x="3712464" y="5961888"/>
-            <a:ext cx="841248" cy="73152"/>
-          </a:xfrm>
-          <a:prstGeom prst="rect">
-            <a:avLst/>
-          </a:prstGeom>
-          <a:noFill/>
-        </p:spPr>
-        <p:txBody>
-          <a:bodyPr wrap="square" lIns="27432" rIns="27432">
-            <a:spAutoFit/>
-          </a:bodyPr>
-          <a:lstStyle/>
-          <a:p>
-            <a:pPr algn="ctr"/>
-            <a:r>
-              <a:rPr sz="570" b="0" i="0">
-                <a:solidFill>
-                  <a:srgbClr val="E8E8E8"/>
-                </a:solidFill>
-                <a:latin typeface="Arial"/>
-              </a:rPr>
-              <a:t>Copilot PR</a:t>
-            </a:r>
-          </a:p>
-        </p:txBody>
-      </p:sp>
-      <p:sp>
-        <p:nvSpPr>
-          <p:cNvPr id="80" name="TextBox 79"/>
-          <p:cNvSpPr txBox="1"/>
-          <p:nvPr/>
-        </p:nvSpPr>
-        <p:spPr>
-          <a:xfrm>
-            <a:off x="4507992" y="5678424"/>
-            <a:ext cx="182880" cy="73152"/>
-          </a:xfrm>
-          <a:prstGeom prst="rect">
-            <a:avLst/>
-          </a:prstGeom>
-          <a:noFill/>
-        </p:spPr>
-        <p:txBody>
-          <a:bodyPr wrap="square" lIns="27432" rIns="27432">
-            <a:spAutoFit/>
-          </a:bodyPr>
-          <a:lstStyle/>
-          <a:p>
-            <a:pPr algn="ctr"/>
-            <a:r>
-              <a:rPr sz="1000" b="1" i="0">
-                <a:solidFill>
-                  <a:srgbClr val="D71920"/>
-                </a:solidFill>
-                <a:latin typeface="Arial"/>
-              </a:rPr>
-              <a:t>&gt;</a:t>
-            </a:r>
-          </a:p>
-        </p:txBody>
-      </p:sp>
-      <p:sp>
-        <p:nvSpPr>
-          <p:cNvPr id="81" name="Rounded Rectangle 80"/>
-          <p:cNvSpPr/>
-          <p:nvPr/>
-        </p:nvSpPr>
-        <p:spPr>
-          <a:xfrm>
-            <a:off x="4837176" y="5650992"/>
-            <a:ext cx="566928" cy="256032"/>
-          </a:xfrm>
-          <a:prstGeom prst="roundRect">
-            <a:avLst/>
-          </a:prstGeom>
-          <a:solidFill>
-            <a:srgbClr val="2E7D32"/>
-          </a:solidFill>
-          <a:ln>
-            <a:noFill/>
-          </a:ln>
-        </p:spPr>
-        <p:style>
-          <a:lnRef idx="1">
-            <a:schemeClr val="accent1"/>
-          </a:lnRef>
-          <a:fillRef idx="3">
-            <a:schemeClr val="accent1"/>
-          </a:fillRef>
-          <a:effectRef idx="2">
-            <a:schemeClr val="accent1"/>
-          </a:effectRef>
-          <a:fontRef idx="minor">
-            <a:schemeClr val="lt1"/>
-          </a:fontRef>
-        </p:style>
-        <p:txBody>
-          <a:bodyPr rtlCol="0" anchor="ctr"/>
-          <a:lstStyle/>
-          <a:p>
-            <a:pPr algn="ctr"/>
-          </a:p>
-        </p:txBody>
-      </p:sp>
-      <p:sp>
-        <p:nvSpPr>
-          <p:cNvPr id="82" name="TextBox 81"/>
-          <p:cNvSpPr txBox="1"/>
-          <p:nvPr/>
-        </p:nvSpPr>
-        <p:spPr>
-          <a:xfrm>
-            <a:off x="4837176" y="5701284"/>
-            <a:ext cx="566928" cy="73152"/>
-          </a:xfrm>
-          <a:prstGeom prst="rect">
-            <a:avLst/>
-          </a:prstGeom>
-          <a:noFill/>
-        </p:spPr>
-        <p:txBody>
-          <a:bodyPr wrap="square" lIns="27432" rIns="27432">
-            <a:spAutoFit/>
-          </a:bodyPr>
-          <a:lstStyle/>
-          <a:p>
-            <a:pPr algn="ctr"/>
-            <a:r>
-              <a:rPr sz="650" b="1" i="0">
-                <a:solidFill>
-                  <a:srgbClr val="FFFFFF"/>
-                </a:solidFill>
-                <a:latin typeface="Arial"/>
-              </a:rPr>
-              <a:t>PG5</a:t>
-            </a:r>
-          </a:p>
-        </p:txBody>
-      </p:sp>
-      <p:sp>
-        <p:nvSpPr>
-          <p:cNvPr id="83" name="TextBox 82"/>
-          <p:cNvSpPr txBox="1"/>
-          <p:nvPr/>
-        </p:nvSpPr>
-        <p:spPr>
-          <a:xfrm>
-            <a:off x="4700016" y="5961888"/>
-            <a:ext cx="841248" cy="73152"/>
-          </a:xfrm>
-          <a:prstGeom prst="rect">
-            <a:avLst/>
-          </a:prstGeom>
-          <a:noFill/>
-        </p:spPr>
-        <p:txBody>
-          <a:bodyPr wrap="square" lIns="27432" rIns="27432">
-            <a:spAutoFit/>
-          </a:bodyPr>
-          <a:lstStyle/>
-          <a:p>
-            <a:pPr algn="ctr"/>
-            <a:r>
-              <a:rPr sz="570" b="0" i="0">
-                <a:solidFill>
-                  <a:srgbClr val="E8E8E8"/>
-                </a:solidFill>
-                <a:latin typeface="Arial"/>
-              </a:rPr>
-              <a:t>Gate verdict</a:t>
-            </a:r>
-          </a:p>
-        </p:txBody>
-      </p:sp>
-      <p:sp>
-        <p:nvSpPr>
-          <p:cNvPr id="84" name="TextBox 83"/>
-          <p:cNvSpPr txBox="1"/>
-          <p:nvPr/>
-        </p:nvSpPr>
-        <p:spPr>
-          <a:xfrm>
-            <a:off x="5495544" y="5678424"/>
-            <a:ext cx="182880" cy="73152"/>
-          </a:xfrm>
-          <a:prstGeom prst="rect">
-            <a:avLst/>
-          </a:prstGeom>
-          <a:noFill/>
-        </p:spPr>
-        <p:txBody>
-          <a:bodyPr wrap="square" lIns="27432" rIns="27432">
-            <a:spAutoFit/>
-          </a:bodyPr>
-          <a:lstStyle/>
-          <a:p>
-            <a:pPr algn="ctr"/>
-            <a:r>
-              <a:rPr sz="1000" b="1" i="0">
-                <a:solidFill>
-                  <a:srgbClr val="D71920"/>
-                </a:solidFill>
-                <a:latin typeface="Arial"/>
-              </a:rPr>
-              <a:t>&gt;</a:t>
-            </a:r>
-          </a:p>
-        </p:txBody>
-      </p:sp>
-      <p:sp>
-        <p:nvSpPr>
-          <p:cNvPr id="85" name="Rounded Rectangle 84"/>
-          <p:cNvSpPr/>
-          <p:nvPr/>
-        </p:nvSpPr>
-        <p:spPr>
-          <a:xfrm>
-            <a:off x="5824728" y="5650992"/>
-            <a:ext cx="566928" cy="256032"/>
-          </a:xfrm>
-          <a:prstGeom prst="roundRect">
-            <a:avLst/>
-          </a:prstGeom>
-          <a:solidFill>
-            <a:srgbClr val="D71920"/>
-          </a:solidFill>
-          <a:ln>
-            <a:noFill/>
-          </a:ln>
-        </p:spPr>
-        <p:style>
-          <a:lnRef idx="1">
-            <a:schemeClr val="accent1"/>
-          </a:lnRef>
-          <a:fillRef idx="3">
-            <a:schemeClr val="accent1"/>
-          </a:fillRef>
-          <a:effectRef idx="2">
-            <a:schemeClr val="accent1"/>
-          </a:effectRef>
-          <a:fontRef idx="minor">
-            <a:schemeClr val="lt1"/>
-          </a:fontRef>
-        </p:style>
-        <p:txBody>
-          <a:bodyPr rtlCol="0" anchor="ctr"/>
-          <a:lstStyle/>
-          <a:p>
-            <a:pPr algn="ctr"/>
-          </a:p>
-        </p:txBody>
-      </p:sp>
-      <p:sp>
-        <p:nvSpPr>
-          <p:cNvPr id="86" name="TextBox 85"/>
-          <p:cNvSpPr txBox="1"/>
-          <p:nvPr/>
-        </p:nvSpPr>
-        <p:spPr>
-          <a:xfrm>
-            <a:off x="5824728" y="5701284"/>
-            <a:ext cx="566928" cy="73152"/>
-          </a:xfrm>
-          <a:prstGeom prst="rect">
-            <a:avLst/>
-          </a:prstGeom>
-          <a:noFill/>
-        </p:spPr>
-        <p:txBody>
-          <a:bodyPr wrap="square" lIns="27432" rIns="27432">
-            <a:spAutoFit/>
-          </a:bodyPr>
-          <a:lstStyle/>
-          <a:p>
-            <a:pPr algn="ctr"/>
-            <a:r>
-              <a:rPr sz="650" b="1" i="0">
-                <a:solidFill>
-                  <a:srgbClr val="FFFFFF"/>
-                </a:solidFill>
-                <a:latin typeface="Arial"/>
-              </a:rPr>
-              <a:t>LEARN</a:t>
-            </a:r>
-          </a:p>
-        </p:txBody>
-      </p:sp>
-      <p:sp>
-        <p:nvSpPr>
-          <p:cNvPr id="87" name="TextBox 86"/>
-          <p:cNvSpPr txBox="1"/>
-          <p:nvPr/>
-        </p:nvSpPr>
-        <p:spPr>
-          <a:xfrm>
-            <a:off x="5687568" y="5961888"/>
-            <a:ext cx="841248" cy="73152"/>
-          </a:xfrm>
-          <a:prstGeom prst="rect">
-            <a:avLst/>
-          </a:prstGeom>
-          <a:noFill/>
-        </p:spPr>
-        <p:txBody>
-          <a:bodyPr wrap="square" lIns="27432" rIns="27432">
-            <a:spAutoFit/>
-          </a:bodyPr>
-          <a:lstStyle/>
-          <a:p>
-            <a:pPr algn="ctr"/>
-            <a:r>
-              <a:rPr sz="570" b="0" i="0">
-                <a:solidFill>
-                  <a:srgbClr val="E8E8E8"/>
-                </a:solidFill>
-                <a:latin typeface="Arial"/>
-              </a:rPr>
-              <a:t>QA2Release</a:t>
-            </a:r>
-          </a:p>
-        </p:txBody>
-      </p:sp>
-      <p:sp>
-        <p:nvSpPr>
-          <p:cNvPr id="88" name="Rounded Rectangle 87"/>
-          <p:cNvSpPr/>
-          <p:nvPr/>
-        </p:nvSpPr>
-        <p:spPr>
-          <a:xfrm>
-            <a:off x="7388352" y="5468112"/>
-            <a:ext cx="4553712" cy="749808"/>
-          </a:xfrm>
-          <a:prstGeom prst="roundRect">
-            <a:avLst/>
-          </a:prstGeom>
-          <a:solidFill>
-            <a:srgbClr val="333333"/>
-          </a:solidFill>
-          <a:ln w="15240">
-            <a:solidFill>
-              <a:srgbClr val="D71920"/>
-            </a:solidFill>
-          </a:ln>
-        </p:spPr>
-        <p:style>
-          <a:lnRef idx="1">
-            <a:schemeClr val="accent1"/>
-          </a:lnRef>
-          <a:fillRef idx="3">
-            <a:schemeClr val="accent1"/>
-          </a:fillRef>
-          <a:effectRef idx="2">
-            <a:schemeClr val="accent1"/>
-          </a:effectRef>
-          <a:fontRef idx="minor">
-            <a:schemeClr val="lt1"/>
-          </a:fontRef>
-        </p:style>
-        <p:txBody>
-          <a:bodyPr rtlCol="0" anchor="ctr"/>
-          <a:lstStyle/>
-          <a:p>
-            <a:pPr algn="ctr"/>
-          </a:p>
-        </p:txBody>
-      </p:sp>
-      <p:sp>
-        <p:nvSpPr>
-          <p:cNvPr id="89" name="TextBox 88"/>
-          <p:cNvSpPr txBox="1"/>
-          <p:nvPr/>
-        </p:nvSpPr>
-        <p:spPr>
-          <a:xfrm>
-            <a:off x="7571231" y="5577840"/>
-            <a:ext cx="1737360" cy="118872"/>
-          </a:xfrm>
-          <a:prstGeom prst="rect">
-            <a:avLst/>
-          </a:prstGeom>
-          <a:noFill/>
-        </p:spPr>
-        <p:txBody>
-          <a:bodyPr wrap="square" lIns="27432" rIns="27432">
-            <a:spAutoFit/>
-          </a:bodyPr>
-          <a:lstStyle/>
-          <a:p>
-            <a:pPr algn="l"/>
-            <a:r>
-              <a:rPr sz="850" b="1" i="0">
-                <a:solidFill>
-                  <a:srgbClr val="D71920"/>
-                </a:solidFill>
-                <a:latin typeface="Arial"/>
-              </a:rPr>
-              <a:t>STANDOUT DIFFERENTIATOR</a:t>
-            </a:r>
-          </a:p>
-        </p:txBody>
-      </p:sp>
-      <p:sp>
-        <p:nvSpPr>
-          <p:cNvPr id="90" name="TextBox 89"/>
-          <p:cNvSpPr txBox="1"/>
-          <p:nvPr/>
-        </p:nvSpPr>
-        <p:spPr>
-          <a:xfrm>
-            <a:off x="7571231" y="5806440"/>
-            <a:ext cx="4133087" cy="182880"/>
-          </a:xfrm>
-          <a:prstGeom prst="rect">
-            <a:avLst/>
-          </a:prstGeom>
-          <a:noFill/>
-        </p:spPr>
-        <p:txBody>
-          <a:bodyPr wrap="square" lIns="27432" rIns="27432">
-            <a:spAutoFit/>
-          </a:bodyPr>
-          <a:lstStyle/>
-          <a:p>
-            <a:pPr algn="l"/>
-            <a:r>
-              <a:rPr sz="750" b="0" i="0">
-                <a:solidFill>
-                  <a:srgbClr val="E8E8E8"/>
-                </a:solidFill>
-                <a:latin typeface="Arial"/>
-              </a:rPr>
-              <a:t>JTAG evidence is no longer isolated debug data; AEPLO turns it into lifecycle evidence, agent context, controlled fixes and launch-readiness proof.</a:t>
-            </a:r>
-          </a:p>
-        </p:txBody>
-      </p:sp>
-      <p:sp>
-        <p:nvSpPr>
-          <p:cNvPr id="91" name="TextBox 90"/>
-          <p:cNvSpPr txBox="1"/>
-          <p:nvPr/>
-        </p:nvSpPr>
-        <p:spPr>
-          <a:xfrm>
-            <a:off x="292608" y="6611112"/>
-            <a:ext cx="2926080" cy="91440"/>
-          </a:xfrm>
-          <a:prstGeom prst="rect">
-            <a:avLst/>
-          </a:prstGeom>
-          <a:noFill/>
-        </p:spPr>
-        <p:txBody>
-          <a:bodyPr wrap="square" lIns="27432" rIns="27432">
-            <a:spAutoFit/>
-          </a:bodyPr>
-          <a:lstStyle/>
-          <a:p>
-            <a:pPr algn="l"/>
-            <a:r>
-              <a:rPr sz="780" b="1" i="0">
+              <a:rPr sz="720" b="1" i="0">
                 <a:solidFill>
                   <a:srgbClr val="111111"/>
                 </a:solidFill>
@@ -6550,14 +6068,14 @@
       </p:sp>
       <p:sp>
         <p:nvSpPr>
-          <p:cNvPr id="92" name="TextBox 91"/>
+          <p:cNvPr id="81" name="TextBox 80"/>
           <p:cNvSpPr txBox="1"/>
           <p:nvPr/>
         </p:nvSpPr>
         <p:spPr>
           <a:xfrm>
-            <a:off x="3337560" y="6611112"/>
-            <a:ext cx="8174736" cy="91440"/>
+            <a:off x="3566160" y="6547104"/>
+            <a:ext cx="8119872" cy="73152"/>
           </a:xfrm>
           <a:prstGeom prst="rect">
             <a:avLst/>
@@ -6565,20 +6083,20 @@
           <a:noFill/>
         </p:spPr>
         <p:txBody>
-          <a:bodyPr wrap="square" lIns="27432" rIns="27432">
+          <a:bodyPr wrap="square" lIns="18288" rIns="18288">
             <a:spAutoFit/>
           </a:bodyPr>
           <a:lstStyle/>
           <a:p>
             <a:pPr algn="r"/>
             <a:r>
-              <a:rPr sz="650" b="1" i="0">
+              <a:rPr sz="610" b="1" i="0">
                 <a:solidFill>
                   <a:srgbClr val="111111"/>
                 </a:solidFill>
                 <a:latin typeface="Arial"/>
               </a:rPr>
-              <a:t>ROVO Studio | Copilot | Atlassian MCP | GitHub | Jira | Confluence | AEPLO JTAG Accelerator</a:t>
+              <a:t>SoC / MCU | PCB traces | JTAG/SWD | ROVO Studio | Copilot | Atlassian MCP | GitHub | Jira | Confluence</a:t>
             </a:r>
           </a:p>
         </p:txBody>

--- a/Coding Embedded Workstream - Common Idea Poster V2.pptx
+++ b/Coding Embedded Workstream - Common Idea Poster V2.pptx
@@ -6097,6 +6097,41 @@
                 <a:latin typeface="Arial"/>
               </a:rPr>
               <a:t>SoC / MCU | PCB traces | JTAG/SWD | ROVO Studio | Copilot | Atlassian MCP | GitHub | Jira | Confluence</a:t>
+            </a:r>
+          </a:p>
+        </p:txBody>
+      </p:sp>
+      <p:sp>
+        <p:nvSpPr>
+          <p:cNvPr id="82" name="TextBox 81"/>
+          <p:cNvSpPr txBox="1"/>
+          <p:nvPr/>
+        </p:nvSpPr>
+        <p:spPr>
+          <a:xfrm>
+            <a:off x="5925312" y="3858768"/>
+            <a:ext cx="2926080" cy="164592"/>
+          </a:xfrm>
+          <a:prstGeom prst="rect">
+            <a:avLst/>
+          </a:prstGeom>
+          <a:noFill/>
+        </p:spPr>
+        <p:txBody>
+          <a:bodyPr wrap="none">
+            <a:spAutoFit/>
+          </a:bodyPr>
+          <a:lstStyle/>
+          <a:p>
+            <a:pPr algn="l"/>
+            <a:r>
+              <a:rPr sz="850" b="1">
+                <a:solidFill>
+                  <a:srgbClr val="D71920"/>
+                </a:solidFill>
+                <a:latin typeface="Arial"/>
+              </a:rPr>
+              <a:t>DEBUG SIGNALS + REGISTER EVIDENCE</a:t>
             </a:r>
           </a:p>
         </p:txBody>
